--- a/Foundation Model Project/20251229.pptx
+++ b/Foundation Model Project/20251229.pptx
@@ -7,6 +7,7 @@
   <p:sldIdLst>
     <p:sldId id="256" r:id="rId2"/>
     <p:sldId id="257" r:id="rId3"/>
+    <p:sldId id="258" r:id="rId4"/>
   </p:sldIdLst>
   <p:sldSz cx="12192000" cy="6858000"/>
   <p:notesSz cx="6858000" cy="9144000"/>
@@ -3622,6 +3623,2948 @@
 </p:sld>
 </file>
 
+<file path=ppt/slides/slide3.xml><?xml version="1.0" encoding="utf-8"?>
+<p:sld xmlns:a="http://schemas.openxmlformats.org/drawingml/2006/main" xmlns:r="http://schemas.openxmlformats.org/officeDocument/2006/relationships" xmlns:p="http://schemas.openxmlformats.org/presentationml/2006/main">
+  <p:cSld>
+    <p:spTree>
+      <p:nvGrpSpPr>
+        <p:cNvPr id="1" name=""/>
+        <p:cNvGrpSpPr/>
+        <p:nvPr/>
+      </p:nvGrpSpPr>
+      <p:grpSpPr>
+        <a:xfrm>
+          <a:off x="0" y="0"/>
+          <a:ext cx="0" cy="0"/>
+          <a:chOff x="0" y="0"/>
+          <a:chExt cx="0" cy="0"/>
+        </a:xfrm>
+      </p:grpSpPr>
+      <p:sp>
+        <p:nvSpPr>
+          <p:cNvPr id="2" name="标题 1">
+            <a:extLst>
+              <a:ext uri="{FF2B5EF4-FFF2-40B4-BE49-F238E27FC236}">
+                <a16:creationId xmlns:a16="http://schemas.microsoft.com/office/drawing/2014/main" id="{F2ED31A5-12C3-E19B-E6C9-E9B40DC968D5}"/>
+              </a:ext>
+            </a:extLst>
+          </p:cNvPr>
+          <p:cNvSpPr>
+            <a:spLocks noGrp="1"/>
+          </p:cNvSpPr>
+          <p:nvPr>
+            <p:ph type="title"/>
+          </p:nvPr>
+        </p:nvSpPr>
+        <p:spPr/>
+        <p:txBody>
+          <a:bodyPr/>
+          <a:lstStyle/>
+          <a:p>
+            <a:r>
+              <a:rPr lang="zh-CN" altLang="en-US" sz="2400" b="1" dirty="0">
+                <a:latin typeface="微软雅黑" panose="020B0503020204020204" pitchFamily="34" charset="-122"/>
+                <a:ea typeface="微软雅黑" panose="020B0503020204020204" pitchFamily="34" charset="-122"/>
+              </a:rPr>
+              <a:t>其他类型图像的基础模型研究：</a:t>
+            </a:r>
+          </a:p>
+        </p:txBody>
+      </p:sp>
+      <p:graphicFrame>
+        <p:nvGraphicFramePr>
+          <p:cNvPr id="4" name="内容占位符 3">
+            <a:extLst>
+              <a:ext uri="{FF2B5EF4-FFF2-40B4-BE49-F238E27FC236}">
+                <a16:creationId xmlns:a16="http://schemas.microsoft.com/office/drawing/2014/main" id="{EC3066E3-C88C-D50C-0B07-364A8CFB9D7F}"/>
+              </a:ext>
+            </a:extLst>
+          </p:cNvPr>
+          <p:cNvGraphicFramePr>
+            <a:graphicFrameLocks noGrp="1"/>
+          </p:cNvGraphicFramePr>
+          <p:nvPr>
+            <p:ph idx="1"/>
+            <p:extLst>
+              <p:ext uri="{D42A27DB-BD31-4B8C-83A1-F6EECF244321}">
+                <p14:modId xmlns:p14="http://schemas.microsoft.com/office/powerpoint/2010/main" val="1845157500"/>
+              </p:ext>
+            </p:extLst>
+          </p:nvPr>
+        </p:nvGraphicFramePr>
+        <p:xfrm>
+          <a:off x="838200" y="1825625"/>
+          <a:ext cx="10515603" cy="4352227"/>
+        </p:xfrm>
+        <a:graphic>
+          <a:graphicData uri="http://schemas.openxmlformats.org/drawingml/2006/table">
+            <a:tbl>
+              <a:tblPr/>
+              <a:tblGrid>
+                <a:gridCol w="1502229">
+                  <a:extLst>
+                    <a:ext uri="{9D8B030D-6E8A-4147-A177-3AD203B41FA5}">
+                      <a16:colId xmlns:a16="http://schemas.microsoft.com/office/drawing/2014/main" val="3665443782"/>
+                    </a:ext>
+                  </a:extLst>
+                </a:gridCol>
+                <a:gridCol w="1502229">
+                  <a:extLst>
+                    <a:ext uri="{9D8B030D-6E8A-4147-A177-3AD203B41FA5}">
+                      <a16:colId xmlns:a16="http://schemas.microsoft.com/office/drawing/2014/main" val="307081230"/>
+                    </a:ext>
+                  </a:extLst>
+                </a:gridCol>
+                <a:gridCol w="1502229">
+                  <a:extLst>
+                    <a:ext uri="{9D8B030D-6E8A-4147-A177-3AD203B41FA5}">
+                      <a16:colId xmlns:a16="http://schemas.microsoft.com/office/drawing/2014/main" val="3919113719"/>
+                    </a:ext>
+                  </a:extLst>
+                </a:gridCol>
+                <a:gridCol w="1502229">
+                  <a:extLst>
+                    <a:ext uri="{9D8B030D-6E8A-4147-A177-3AD203B41FA5}">
+                      <a16:colId xmlns:a16="http://schemas.microsoft.com/office/drawing/2014/main" val="1838581778"/>
+                    </a:ext>
+                  </a:extLst>
+                </a:gridCol>
+                <a:gridCol w="1502229">
+                  <a:extLst>
+                    <a:ext uri="{9D8B030D-6E8A-4147-A177-3AD203B41FA5}">
+                      <a16:colId xmlns:a16="http://schemas.microsoft.com/office/drawing/2014/main" val="657039954"/>
+                    </a:ext>
+                  </a:extLst>
+                </a:gridCol>
+                <a:gridCol w="1502229">
+                  <a:extLst>
+                    <a:ext uri="{9D8B030D-6E8A-4147-A177-3AD203B41FA5}">
+                      <a16:colId xmlns:a16="http://schemas.microsoft.com/office/drawing/2014/main" val="2800093166"/>
+                    </a:ext>
+                  </a:extLst>
+                </a:gridCol>
+                <a:gridCol w="1502229">
+                  <a:extLst>
+                    <a:ext uri="{9D8B030D-6E8A-4147-A177-3AD203B41FA5}">
+                      <a16:colId xmlns:a16="http://schemas.microsoft.com/office/drawing/2014/main" val="1320926972"/>
+                    </a:ext>
+                  </a:extLst>
+                </a:gridCol>
+              </a:tblGrid>
+              <a:tr h="139367">
+                <a:tc>
+                  <a:txBody>
+                    <a:bodyPr/>
+                    <a:lstStyle/>
+                    <a:p>
+                      <a:pPr algn="ctr" fontAlgn="ctr">
+                        <a:buNone/>
+                      </a:pPr>
+                      <a:r>
+                        <a:rPr lang="zh-CN" altLang="en-US" sz="900" b="1" i="0" u="none" strike="noStrike">
+                          <a:solidFill>
+                            <a:srgbClr val="000000"/>
+                          </a:solidFill>
+                          <a:effectLst/>
+                          <a:latin typeface="等线" panose="02010600030101010101" pitchFamily="2" charset="-122"/>
+                          <a:ea typeface="等线" panose="02010600030101010101" pitchFamily="2" charset="-122"/>
+                        </a:rPr>
+                        <a:t>文章</a:t>
+                      </a:r>
+                    </a:p>
+                  </a:txBody>
+                  <a:tcPr marL="3097" marR="3097" marT="3097" marB="0" anchor="ctr">
+                    <a:lnL w="12700" cap="flat" cmpd="sng" algn="ctr">
+                      <a:solidFill>
+                        <a:schemeClr val="tx1"/>
+                      </a:solidFill>
+                      <a:prstDash val="solid"/>
+                      <a:round/>
+                      <a:headEnd type="none" w="med" len="med"/>
+                      <a:tailEnd type="none" w="med" len="med"/>
+                    </a:lnL>
+                    <a:lnR w="12700" cap="flat" cmpd="sng" algn="ctr">
+                      <a:solidFill>
+                        <a:schemeClr val="tx1"/>
+                      </a:solidFill>
+                      <a:prstDash val="solid"/>
+                      <a:round/>
+                      <a:headEnd type="none" w="med" len="med"/>
+                      <a:tailEnd type="none" w="med" len="med"/>
+                    </a:lnR>
+                    <a:lnT w="12700" cap="flat" cmpd="sng" algn="ctr">
+                      <a:solidFill>
+                        <a:schemeClr val="tx1"/>
+                      </a:solidFill>
+                      <a:prstDash val="solid"/>
+                      <a:round/>
+                      <a:headEnd type="none" w="med" len="med"/>
+                      <a:tailEnd type="none" w="med" len="med"/>
+                    </a:lnT>
+                    <a:lnB w="12700" cap="flat" cmpd="sng" algn="ctr">
+                      <a:solidFill>
+                        <a:schemeClr val="tx1"/>
+                      </a:solidFill>
+                      <a:prstDash val="solid"/>
+                      <a:round/>
+                      <a:headEnd type="none" w="med" len="med"/>
+                      <a:tailEnd type="none" w="med" len="med"/>
+                    </a:lnB>
+                    <a:noFill/>
+                  </a:tcPr>
+                </a:tc>
+                <a:tc>
+                  <a:txBody>
+                    <a:bodyPr/>
+                    <a:lstStyle/>
+                    <a:p>
+                      <a:pPr algn="ctr" fontAlgn="ctr">
+                        <a:buNone/>
+                      </a:pPr>
+                      <a:r>
+                        <a:rPr lang="zh-CN" altLang="en-US" sz="900" b="1" i="0" u="none" strike="noStrike">
+                          <a:solidFill>
+                            <a:srgbClr val="000000"/>
+                          </a:solidFill>
+                          <a:effectLst/>
+                          <a:latin typeface="等线" panose="02010600030101010101" pitchFamily="2" charset="-122"/>
+                          <a:ea typeface="等线" panose="02010600030101010101" pitchFamily="2" charset="-122"/>
+                        </a:rPr>
+                        <a:t>年份</a:t>
+                      </a:r>
+                    </a:p>
+                  </a:txBody>
+                  <a:tcPr marL="3097" marR="3097" marT="3097" marB="0" anchor="ctr">
+                    <a:lnL w="12700" cap="flat" cmpd="sng" algn="ctr">
+                      <a:solidFill>
+                        <a:schemeClr val="tx1"/>
+                      </a:solidFill>
+                      <a:prstDash val="solid"/>
+                      <a:round/>
+                      <a:headEnd type="none" w="med" len="med"/>
+                      <a:tailEnd type="none" w="med" len="med"/>
+                    </a:lnL>
+                    <a:lnR w="12700" cap="flat" cmpd="sng" algn="ctr">
+                      <a:solidFill>
+                        <a:schemeClr val="tx1"/>
+                      </a:solidFill>
+                      <a:prstDash val="solid"/>
+                      <a:round/>
+                      <a:headEnd type="none" w="med" len="med"/>
+                      <a:tailEnd type="none" w="med" len="med"/>
+                    </a:lnR>
+                    <a:lnT w="12700" cap="flat" cmpd="sng" algn="ctr">
+                      <a:solidFill>
+                        <a:schemeClr val="tx1"/>
+                      </a:solidFill>
+                      <a:prstDash val="solid"/>
+                      <a:round/>
+                      <a:headEnd type="none" w="med" len="med"/>
+                      <a:tailEnd type="none" w="med" len="med"/>
+                    </a:lnT>
+                    <a:lnB w="12700" cap="flat" cmpd="sng" algn="ctr">
+                      <a:solidFill>
+                        <a:schemeClr val="tx1"/>
+                      </a:solidFill>
+                      <a:prstDash val="solid"/>
+                      <a:round/>
+                      <a:headEnd type="none" w="med" len="med"/>
+                      <a:tailEnd type="none" w="med" len="med"/>
+                    </a:lnB>
+                    <a:noFill/>
+                  </a:tcPr>
+                </a:tc>
+                <a:tc>
+                  <a:txBody>
+                    <a:bodyPr/>
+                    <a:lstStyle/>
+                    <a:p>
+                      <a:pPr algn="ctr" fontAlgn="ctr">
+                        <a:buNone/>
+                      </a:pPr>
+                      <a:r>
+                        <a:rPr lang="zh-CN" altLang="en-US" sz="900" b="1" i="0" u="none" strike="noStrike">
+                          <a:solidFill>
+                            <a:srgbClr val="000000"/>
+                          </a:solidFill>
+                          <a:effectLst/>
+                          <a:latin typeface="等线" panose="02010600030101010101" pitchFamily="2" charset="-122"/>
+                          <a:ea typeface="等线" panose="02010600030101010101" pitchFamily="2" charset="-122"/>
+                        </a:rPr>
+                        <a:t>期刊</a:t>
+                      </a:r>
+                    </a:p>
+                  </a:txBody>
+                  <a:tcPr marL="3097" marR="3097" marT="3097" marB="0" anchor="ctr">
+                    <a:lnL w="12700" cap="flat" cmpd="sng" algn="ctr">
+                      <a:solidFill>
+                        <a:schemeClr val="tx1"/>
+                      </a:solidFill>
+                      <a:prstDash val="solid"/>
+                      <a:round/>
+                      <a:headEnd type="none" w="med" len="med"/>
+                      <a:tailEnd type="none" w="med" len="med"/>
+                    </a:lnL>
+                    <a:lnR w="12700" cap="flat" cmpd="sng" algn="ctr">
+                      <a:solidFill>
+                        <a:schemeClr val="tx1"/>
+                      </a:solidFill>
+                      <a:prstDash val="solid"/>
+                      <a:round/>
+                      <a:headEnd type="none" w="med" len="med"/>
+                      <a:tailEnd type="none" w="med" len="med"/>
+                    </a:lnR>
+                    <a:lnT w="12700" cap="flat" cmpd="sng" algn="ctr">
+                      <a:solidFill>
+                        <a:schemeClr val="tx1"/>
+                      </a:solidFill>
+                      <a:prstDash val="solid"/>
+                      <a:round/>
+                      <a:headEnd type="none" w="med" len="med"/>
+                      <a:tailEnd type="none" w="med" len="med"/>
+                    </a:lnT>
+                    <a:lnB w="12700" cap="flat" cmpd="sng" algn="ctr">
+                      <a:solidFill>
+                        <a:schemeClr val="tx1"/>
+                      </a:solidFill>
+                      <a:prstDash val="solid"/>
+                      <a:round/>
+                      <a:headEnd type="none" w="med" len="med"/>
+                      <a:tailEnd type="none" w="med" len="med"/>
+                    </a:lnB>
+                    <a:noFill/>
+                  </a:tcPr>
+                </a:tc>
+                <a:tc>
+                  <a:txBody>
+                    <a:bodyPr/>
+                    <a:lstStyle/>
+                    <a:p>
+                      <a:pPr algn="ctr" fontAlgn="ctr">
+                        <a:buNone/>
+                      </a:pPr>
+                      <a:r>
+                        <a:rPr lang="zh-CN" altLang="en-US" sz="900" b="1" i="0" u="none" strike="noStrike">
+                          <a:solidFill>
+                            <a:srgbClr val="000000"/>
+                          </a:solidFill>
+                          <a:effectLst/>
+                          <a:latin typeface="等线" panose="02010600030101010101" pitchFamily="2" charset="-122"/>
+                          <a:ea typeface="等线" panose="02010600030101010101" pitchFamily="2" charset="-122"/>
+                        </a:rPr>
+                        <a:t>影响因子</a:t>
+                      </a:r>
+                    </a:p>
+                  </a:txBody>
+                  <a:tcPr marL="3097" marR="3097" marT="3097" marB="0" anchor="ctr">
+                    <a:lnL w="12700" cap="flat" cmpd="sng" algn="ctr">
+                      <a:solidFill>
+                        <a:schemeClr val="tx1"/>
+                      </a:solidFill>
+                      <a:prstDash val="solid"/>
+                      <a:round/>
+                      <a:headEnd type="none" w="med" len="med"/>
+                      <a:tailEnd type="none" w="med" len="med"/>
+                    </a:lnL>
+                    <a:lnR w="12700" cap="flat" cmpd="sng" algn="ctr">
+                      <a:solidFill>
+                        <a:schemeClr val="tx1"/>
+                      </a:solidFill>
+                      <a:prstDash val="solid"/>
+                      <a:round/>
+                      <a:headEnd type="none" w="med" len="med"/>
+                      <a:tailEnd type="none" w="med" len="med"/>
+                    </a:lnR>
+                    <a:lnT w="12700" cap="flat" cmpd="sng" algn="ctr">
+                      <a:solidFill>
+                        <a:schemeClr val="tx1"/>
+                      </a:solidFill>
+                      <a:prstDash val="solid"/>
+                      <a:round/>
+                      <a:headEnd type="none" w="med" len="med"/>
+                      <a:tailEnd type="none" w="med" len="med"/>
+                    </a:lnT>
+                    <a:lnB w="12700" cap="flat" cmpd="sng" algn="ctr">
+                      <a:solidFill>
+                        <a:schemeClr val="tx1"/>
+                      </a:solidFill>
+                      <a:prstDash val="solid"/>
+                      <a:round/>
+                      <a:headEnd type="none" w="med" len="med"/>
+                      <a:tailEnd type="none" w="med" len="med"/>
+                    </a:lnB>
+                    <a:noFill/>
+                  </a:tcPr>
+                </a:tc>
+                <a:tc>
+                  <a:txBody>
+                    <a:bodyPr/>
+                    <a:lstStyle/>
+                    <a:p>
+                      <a:pPr algn="ctr" fontAlgn="ctr">
+                        <a:buNone/>
+                      </a:pPr>
+                      <a:r>
+                        <a:rPr lang="zh-CN" altLang="en-US" sz="900" b="1" i="0" u="none" strike="noStrike">
+                          <a:solidFill>
+                            <a:srgbClr val="000000"/>
+                          </a:solidFill>
+                          <a:effectLst/>
+                          <a:latin typeface="等线" panose="02010600030101010101" pitchFamily="2" charset="-122"/>
+                          <a:ea typeface="等线" panose="02010600030101010101" pitchFamily="2" charset="-122"/>
+                        </a:rPr>
+                        <a:t>数据种类</a:t>
+                      </a:r>
+                    </a:p>
+                  </a:txBody>
+                  <a:tcPr marL="3097" marR="3097" marT="3097" marB="0" anchor="ctr">
+                    <a:lnL w="12700" cap="flat" cmpd="sng" algn="ctr">
+                      <a:solidFill>
+                        <a:schemeClr val="tx1"/>
+                      </a:solidFill>
+                      <a:prstDash val="solid"/>
+                      <a:round/>
+                      <a:headEnd type="none" w="med" len="med"/>
+                      <a:tailEnd type="none" w="med" len="med"/>
+                    </a:lnL>
+                    <a:lnR w="12700" cap="flat" cmpd="sng" algn="ctr">
+                      <a:solidFill>
+                        <a:schemeClr val="tx1"/>
+                      </a:solidFill>
+                      <a:prstDash val="solid"/>
+                      <a:round/>
+                      <a:headEnd type="none" w="med" len="med"/>
+                      <a:tailEnd type="none" w="med" len="med"/>
+                    </a:lnR>
+                    <a:lnT w="12700" cap="flat" cmpd="sng" algn="ctr">
+                      <a:solidFill>
+                        <a:schemeClr val="tx1"/>
+                      </a:solidFill>
+                      <a:prstDash val="solid"/>
+                      <a:round/>
+                      <a:headEnd type="none" w="med" len="med"/>
+                      <a:tailEnd type="none" w="med" len="med"/>
+                    </a:lnT>
+                    <a:lnB w="12700" cap="flat" cmpd="sng" algn="ctr">
+                      <a:solidFill>
+                        <a:schemeClr val="tx1"/>
+                      </a:solidFill>
+                      <a:prstDash val="solid"/>
+                      <a:round/>
+                      <a:headEnd type="none" w="med" len="med"/>
+                      <a:tailEnd type="none" w="med" len="med"/>
+                    </a:lnB>
+                    <a:noFill/>
+                  </a:tcPr>
+                </a:tc>
+                <a:tc>
+                  <a:txBody>
+                    <a:bodyPr/>
+                    <a:lstStyle/>
+                    <a:p>
+                      <a:pPr algn="ctr" fontAlgn="ctr">
+                        <a:buNone/>
+                      </a:pPr>
+                      <a:r>
+                        <a:rPr lang="zh-CN" altLang="en-US" sz="900" b="1" i="0" u="none" strike="noStrike">
+                          <a:solidFill>
+                            <a:srgbClr val="000000"/>
+                          </a:solidFill>
+                          <a:effectLst/>
+                          <a:latin typeface="等线" panose="02010600030101010101" pitchFamily="2" charset="-122"/>
+                          <a:ea typeface="等线" panose="02010600030101010101" pitchFamily="2" charset="-122"/>
+                        </a:rPr>
+                        <a:t>数据量</a:t>
+                      </a:r>
+                    </a:p>
+                  </a:txBody>
+                  <a:tcPr marL="3097" marR="3097" marT="3097" marB="0" anchor="ctr">
+                    <a:lnL w="12700" cap="flat" cmpd="sng" algn="ctr">
+                      <a:solidFill>
+                        <a:schemeClr val="tx1"/>
+                      </a:solidFill>
+                      <a:prstDash val="solid"/>
+                      <a:round/>
+                      <a:headEnd type="none" w="med" len="med"/>
+                      <a:tailEnd type="none" w="med" len="med"/>
+                    </a:lnL>
+                    <a:lnR w="12700" cap="flat" cmpd="sng" algn="ctr">
+                      <a:solidFill>
+                        <a:schemeClr val="tx1"/>
+                      </a:solidFill>
+                      <a:prstDash val="solid"/>
+                      <a:round/>
+                      <a:headEnd type="none" w="med" len="med"/>
+                      <a:tailEnd type="none" w="med" len="med"/>
+                    </a:lnR>
+                    <a:lnT w="12700" cap="flat" cmpd="sng" algn="ctr">
+                      <a:solidFill>
+                        <a:schemeClr val="tx1"/>
+                      </a:solidFill>
+                      <a:prstDash val="solid"/>
+                      <a:round/>
+                      <a:headEnd type="none" w="med" len="med"/>
+                      <a:tailEnd type="none" w="med" len="med"/>
+                    </a:lnT>
+                    <a:lnB w="12700" cap="flat" cmpd="sng" algn="ctr">
+                      <a:solidFill>
+                        <a:schemeClr val="tx1"/>
+                      </a:solidFill>
+                      <a:prstDash val="solid"/>
+                      <a:round/>
+                      <a:headEnd type="none" w="med" len="med"/>
+                      <a:tailEnd type="none" w="med" len="med"/>
+                    </a:lnB>
+                    <a:noFill/>
+                  </a:tcPr>
+                </a:tc>
+                <a:tc>
+                  <a:txBody>
+                    <a:bodyPr/>
+                    <a:lstStyle/>
+                    <a:p>
+                      <a:pPr algn="ctr" fontAlgn="ctr">
+                        <a:buNone/>
+                      </a:pPr>
+                      <a:r>
+                        <a:rPr lang="zh-CN" altLang="en-US" sz="900" b="1" i="0" u="none" strike="noStrike">
+                          <a:solidFill>
+                            <a:srgbClr val="000000"/>
+                          </a:solidFill>
+                          <a:effectLst/>
+                          <a:latin typeface="等线" panose="02010600030101010101" pitchFamily="2" charset="-122"/>
+                          <a:ea typeface="等线" panose="02010600030101010101" pitchFamily="2" charset="-122"/>
+                        </a:rPr>
+                        <a:t>用到的方法</a:t>
+                      </a:r>
+                    </a:p>
+                  </a:txBody>
+                  <a:tcPr marL="3097" marR="3097" marT="3097" marB="0" anchor="ctr">
+                    <a:lnL w="12700" cap="flat" cmpd="sng" algn="ctr">
+                      <a:solidFill>
+                        <a:schemeClr val="tx1"/>
+                      </a:solidFill>
+                      <a:prstDash val="solid"/>
+                      <a:round/>
+                      <a:headEnd type="none" w="med" len="med"/>
+                      <a:tailEnd type="none" w="med" len="med"/>
+                    </a:lnL>
+                    <a:lnR w="12700" cap="flat" cmpd="sng" algn="ctr">
+                      <a:solidFill>
+                        <a:schemeClr val="tx1"/>
+                      </a:solidFill>
+                      <a:prstDash val="solid"/>
+                      <a:round/>
+                      <a:headEnd type="none" w="med" len="med"/>
+                      <a:tailEnd type="none" w="med" len="med"/>
+                    </a:lnR>
+                    <a:lnT w="12700" cap="flat" cmpd="sng" algn="ctr">
+                      <a:solidFill>
+                        <a:schemeClr val="tx1"/>
+                      </a:solidFill>
+                      <a:prstDash val="solid"/>
+                      <a:round/>
+                      <a:headEnd type="none" w="med" len="med"/>
+                      <a:tailEnd type="none" w="med" len="med"/>
+                    </a:lnT>
+                    <a:lnB w="12700" cap="flat" cmpd="sng" algn="ctr">
+                      <a:solidFill>
+                        <a:schemeClr val="tx1"/>
+                      </a:solidFill>
+                      <a:prstDash val="solid"/>
+                      <a:round/>
+                      <a:headEnd type="none" w="med" len="med"/>
+                      <a:tailEnd type="none" w="med" len="med"/>
+                    </a:lnB>
+                    <a:noFill/>
+                  </a:tcPr>
+                </a:tc>
+                <a:extLst>
+                  <a:ext uri="{0D108BD9-81ED-4DB2-BD59-A6C34878D82A}">
+                    <a16:rowId xmlns:a16="http://schemas.microsoft.com/office/drawing/2014/main" val="4095336833"/>
+                  </a:ext>
+                </a:extLst>
+              </a:tr>
+              <a:tr h="684445">
+                <a:tc>
+                  <a:txBody>
+                    <a:bodyPr/>
+                    <a:lstStyle/>
+                    <a:p>
+                      <a:pPr algn="ctr" fontAlgn="ctr">
+                        <a:buNone/>
+                      </a:pPr>
+                      <a:r>
+                        <a:rPr lang="en-US" sz="900" b="1" i="0" u="none" strike="noStrike" dirty="0" err="1">
+                          <a:solidFill>
+                            <a:srgbClr val="000000"/>
+                          </a:solidFill>
+                          <a:effectLst/>
+                          <a:latin typeface="等线" panose="02010600030101010101" pitchFamily="2" charset="-122"/>
+                          <a:ea typeface="等线" panose="02010600030101010101" pitchFamily="2" charset="-122"/>
+                        </a:rPr>
+                        <a:t>Medformer</a:t>
+                      </a:r>
+                      <a:r>
+                        <a:rPr lang="en-US" sz="900" b="1" i="0" u="none" strike="noStrike" dirty="0">
+                          <a:solidFill>
+                            <a:srgbClr val="000000"/>
+                          </a:solidFill>
+                          <a:effectLst/>
+                          <a:latin typeface="等线" panose="02010600030101010101" pitchFamily="2" charset="-122"/>
+                          <a:ea typeface="等线" panose="02010600030101010101" pitchFamily="2" charset="-122"/>
+                        </a:rPr>
+                        <a:t>: A Multitask Multimodal Foundational Model for Medical Imaging</a:t>
+                      </a:r>
+                    </a:p>
+                  </a:txBody>
+                  <a:tcPr marL="3097" marR="3097" marT="3097" marB="0" anchor="ctr">
+                    <a:lnL w="12700" cap="flat" cmpd="sng" algn="ctr">
+                      <a:solidFill>
+                        <a:schemeClr val="tx1"/>
+                      </a:solidFill>
+                      <a:prstDash val="solid"/>
+                      <a:round/>
+                      <a:headEnd type="none" w="med" len="med"/>
+                      <a:tailEnd type="none" w="med" len="med"/>
+                    </a:lnL>
+                    <a:lnR w="12700" cap="flat" cmpd="sng" algn="ctr">
+                      <a:solidFill>
+                        <a:schemeClr val="tx1"/>
+                      </a:solidFill>
+                      <a:prstDash val="solid"/>
+                      <a:round/>
+                      <a:headEnd type="none" w="med" len="med"/>
+                      <a:tailEnd type="none" w="med" len="med"/>
+                    </a:lnR>
+                    <a:lnT w="12700" cap="flat" cmpd="sng" algn="ctr">
+                      <a:solidFill>
+                        <a:schemeClr val="tx1"/>
+                      </a:solidFill>
+                      <a:prstDash val="solid"/>
+                      <a:round/>
+                      <a:headEnd type="none" w="med" len="med"/>
+                      <a:tailEnd type="none" w="med" len="med"/>
+                    </a:lnT>
+                    <a:lnB w="12700" cap="flat" cmpd="sng" algn="ctr">
+                      <a:solidFill>
+                        <a:schemeClr val="tx1"/>
+                      </a:solidFill>
+                      <a:prstDash val="solid"/>
+                      <a:round/>
+                      <a:headEnd type="none" w="med" len="med"/>
+                      <a:tailEnd type="none" w="med" len="med"/>
+                    </a:lnB>
+                    <a:noFill/>
+                  </a:tcPr>
+                </a:tc>
+                <a:tc>
+                  <a:txBody>
+                    <a:bodyPr/>
+                    <a:lstStyle/>
+                    <a:p>
+                      <a:pPr algn="ctr" fontAlgn="ctr">
+                        <a:buNone/>
+                      </a:pPr>
+                      <a:r>
+                        <a:rPr lang="en-US" altLang="zh-CN" sz="900" b="1" i="0" u="none" strike="noStrike" dirty="0">
+                          <a:solidFill>
+                            <a:srgbClr val="000000"/>
+                          </a:solidFill>
+                          <a:effectLst/>
+                          <a:latin typeface="等线" panose="02010600030101010101" pitchFamily="2" charset="-122"/>
+                          <a:ea typeface="等线" panose="02010600030101010101" pitchFamily="2" charset="-122"/>
+                        </a:rPr>
+                        <a:t>2025</a:t>
+                      </a:r>
+                    </a:p>
+                  </a:txBody>
+                  <a:tcPr marL="3097" marR="3097" marT="3097" marB="0" anchor="ctr">
+                    <a:lnL w="12700" cap="flat" cmpd="sng" algn="ctr">
+                      <a:solidFill>
+                        <a:schemeClr val="tx1"/>
+                      </a:solidFill>
+                      <a:prstDash val="solid"/>
+                      <a:round/>
+                      <a:headEnd type="none" w="med" len="med"/>
+                      <a:tailEnd type="none" w="med" len="med"/>
+                    </a:lnL>
+                    <a:lnR w="12700" cap="flat" cmpd="sng" algn="ctr">
+                      <a:solidFill>
+                        <a:schemeClr val="tx1"/>
+                      </a:solidFill>
+                      <a:prstDash val="solid"/>
+                      <a:round/>
+                      <a:headEnd type="none" w="med" len="med"/>
+                      <a:tailEnd type="none" w="med" len="med"/>
+                    </a:lnR>
+                    <a:lnT w="12700" cap="flat" cmpd="sng" algn="ctr">
+                      <a:solidFill>
+                        <a:schemeClr val="tx1"/>
+                      </a:solidFill>
+                      <a:prstDash val="solid"/>
+                      <a:round/>
+                      <a:headEnd type="none" w="med" len="med"/>
+                      <a:tailEnd type="none" w="med" len="med"/>
+                    </a:lnT>
+                    <a:lnB w="12700" cap="flat" cmpd="sng" algn="ctr">
+                      <a:solidFill>
+                        <a:schemeClr val="tx1"/>
+                      </a:solidFill>
+                      <a:prstDash val="solid"/>
+                      <a:round/>
+                      <a:headEnd type="none" w="med" len="med"/>
+                      <a:tailEnd type="none" w="med" len="med"/>
+                    </a:lnB>
+                    <a:noFill/>
+                  </a:tcPr>
+                </a:tc>
+                <a:tc>
+                  <a:txBody>
+                    <a:bodyPr/>
+                    <a:lstStyle/>
+                    <a:p>
+                      <a:pPr algn="ctr" fontAlgn="ctr">
+                        <a:buNone/>
+                      </a:pPr>
+                      <a:r>
+                        <a:rPr lang="en-US" sz="900" b="1" i="0" u="none" strike="noStrike" dirty="0">
+                          <a:solidFill>
+                            <a:srgbClr val="000000"/>
+                          </a:solidFill>
+                          <a:effectLst/>
+                          <a:latin typeface="等线" panose="02010600030101010101" pitchFamily="2" charset="-122"/>
+                          <a:ea typeface="等线" panose="02010600030101010101" pitchFamily="2" charset="-122"/>
+                        </a:rPr>
+                        <a:t>Procedia Computer Science</a:t>
+                      </a:r>
+                    </a:p>
+                  </a:txBody>
+                  <a:tcPr marL="3097" marR="3097" marT="3097" marB="0" anchor="ctr">
+                    <a:lnL w="12700" cap="flat" cmpd="sng" algn="ctr">
+                      <a:solidFill>
+                        <a:schemeClr val="tx1"/>
+                      </a:solidFill>
+                      <a:prstDash val="solid"/>
+                      <a:round/>
+                      <a:headEnd type="none" w="med" len="med"/>
+                      <a:tailEnd type="none" w="med" len="med"/>
+                    </a:lnL>
+                    <a:lnR w="12700" cap="flat" cmpd="sng" algn="ctr">
+                      <a:solidFill>
+                        <a:schemeClr val="tx1"/>
+                      </a:solidFill>
+                      <a:prstDash val="solid"/>
+                      <a:round/>
+                      <a:headEnd type="none" w="med" len="med"/>
+                      <a:tailEnd type="none" w="med" len="med"/>
+                    </a:lnR>
+                    <a:lnT w="12700" cap="flat" cmpd="sng" algn="ctr">
+                      <a:solidFill>
+                        <a:schemeClr val="tx1"/>
+                      </a:solidFill>
+                      <a:prstDash val="solid"/>
+                      <a:round/>
+                      <a:headEnd type="none" w="med" len="med"/>
+                      <a:tailEnd type="none" w="med" len="med"/>
+                    </a:lnT>
+                    <a:lnB w="12700" cap="flat" cmpd="sng" algn="ctr">
+                      <a:solidFill>
+                        <a:schemeClr val="tx1"/>
+                      </a:solidFill>
+                      <a:prstDash val="solid"/>
+                      <a:round/>
+                      <a:headEnd type="none" w="med" len="med"/>
+                      <a:tailEnd type="none" w="med" len="med"/>
+                    </a:lnB>
+                    <a:noFill/>
+                  </a:tcPr>
+                </a:tc>
+                <a:tc>
+                  <a:txBody>
+                    <a:bodyPr/>
+                    <a:lstStyle/>
+                    <a:p>
+                      <a:pPr algn="ctr" fontAlgn="ctr">
+                        <a:buNone/>
+                      </a:pPr>
+                      <a:r>
+                        <a:rPr lang="en-US" altLang="zh-CN" sz="900" b="1" i="0" u="none" strike="noStrike" dirty="0">
+                          <a:solidFill>
+                            <a:srgbClr val="000000"/>
+                          </a:solidFill>
+                          <a:effectLst/>
+                          <a:latin typeface="等线" panose="02010600030101010101" pitchFamily="2" charset="-122"/>
+                          <a:ea typeface="等线" panose="02010600030101010101" pitchFamily="2" charset="-122"/>
+                        </a:rPr>
+                        <a:t>4.1</a:t>
+                      </a:r>
+                    </a:p>
+                  </a:txBody>
+                  <a:tcPr marL="3097" marR="3097" marT="3097" marB="0" anchor="ctr">
+                    <a:lnL w="12700" cap="flat" cmpd="sng" algn="ctr">
+                      <a:solidFill>
+                        <a:schemeClr val="tx1"/>
+                      </a:solidFill>
+                      <a:prstDash val="solid"/>
+                      <a:round/>
+                      <a:headEnd type="none" w="med" len="med"/>
+                      <a:tailEnd type="none" w="med" len="med"/>
+                    </a:lnL>
+                    <a:lnR w="12700" cap="flat" cmpd="sng" algn="ctr">
+                      <a:solidFill>
+                        <a:schemeClr val="tx1"/>
+                      </a:solidFill>
+                      <a:prstDash val="solid"/>
+                      <a:round/>
+                      <a:headEnd type="none" w="med" len="med"/>
+                      <a:tailEnd type="none" w="med" len="med"/>
+                    </a:lnR>
+                    <a:lnT w="12700" cap="flat" cmpd="sng" algn="ctr">
+                      <a:solidFill>
+                        <a:schemeClr val="tx1"/>
+                      </a:solidFill>
+                      <a:prstDash val="solid"/>
+                      <a:round/>
+                      <a:headEnd type="none" w="med" len="med"/>
+                      <a:tailEnd type="none" w="med" len="med"/>
+                    </a:lnT>
+                    <a:lnB w="12700" cap="flat" cmpd="sng" algn="ctr">
+                      <a:solidFill>
+                        <a:schemeClr val="tx1"/>
+                      </a:solidFill>
+                      <a:prstDash val="solid"/>
+                      <a:round/>
+                      <a:headEnd type="none" w="med" len="med"/>
+                      <a:tailEnd type="none" w="med" len="med"/>
+                    </a:lnB>
+                    <a:noFill/>
+                  </a:tcPr>
+                </a:tc>
+                <a:tc>
+                  <a:txBody>
+                    <a:bodyPr/>
+                    <a:lstStyle/>
+                    <a:p>
+                      <a:pPr algn="ctr" fontAlgn="ctr">
+                        <a:buNone/>
+                      </a:pPr>
+                      <a:r>
+                        <a:rPr lang="en-US" sz="900" b="1" i="0" u="none" strike="noStrike">
+                          <a:solidFill>
+                            <a:srgbClr val="000000"/>
+                          </a:solidFill>
+                          <a:effectLst/>
+                          <a:latin typeface="等线" panose="02010600030101010101" pitchFamily="2" charset="-122"/>
+                          <a:ea typeface="等线" panose="02010600030101010101" pitchFamily="2" charset="-122"/>
+                        </a:rPr>
+                        <a:t>MedMNIST </a:t>
+                      </a:r>
+                      <a:r>
+                        <a:rPr lang="zh-CN" altLang="en-US" sz="900" b="1" i="0" u="none" strike="noStrike">
+                          <a:solidFill>
+                            <a:srgbClr val="000000"/>
+                          </a:solidFill>
+                          <a:effectLst/>
+                          <a:latin typeface="等线" panose="02010600030101010101" pitchFamily="2" charset="-122"/>
+                          <a:ea typeface="等线" panose="02010600030101010101" pitchFamily="2" charset="-122"/>
+                        </a:rPr>
+                        <a:t>基准多模态数据集</a:t>
+                      </a:r>
+                    </a:p>
+                  </a:txBody>
+                  <a:tcPr marL="3097" marR="3097" marT="3097" marB="0" anchor="ctr">
+                    <a:lnL w="12700" cap="flat" cmpd="sng" algn="ctr">
+                      <a:solidFill>
+                        <a:schemeClr val="tx1"/>
+                      </a:solidFill>
+                      <a:prstDash val="solid"/>
+                      <a:round/>
+                      <a:headEnd type="none" w="med" len="med"/>
+                      <a:tailEnd type="none" w="med" len="med"/>
+                    </a:lnL>
+                    <a:lnR w="12700" cap="flat" cmpd="sng" algn="ctr">
+                      <a:solidFill>
+                        <a:schemeClr val="tx1"/>
+                      </a:solidFill>
+                      <a:prstDash val="solid"/>
+                      <a:round/>
+                      <a:headEnd type="none" w="med" len="med"/>
+                      <a:tailEnd type="none" w="med" len="med"/>
+                    </a:lnR>
+                    <a:lnT w="12700" cap="flat" cmpd="sng" algn="ctr">
+                      <a:solidFill>
+                        <a:schemeClr val="tx1"/>
+                      </a:solidFill>
+                      <a:prstDash val="solid"/>
+                      <a:round/>
+                      <a:headEnd type="none" w="med" len="med"/>
+                      <a:tailEnd type="none" w="med" len="med"/>
+                    </a:lnT>
+                    <a:lnB w="12700" cap="flat" cmpd="sng" algn="ctr">
+                      <a:solidFill>
+                        <a:schemeClr val="tx1"/>
+                      </a:solidFill>
+                      <a:prstDash val="solid"/>
+                      <a:round/>
+                      <a:headEnd type="none" w="med" len="med"/>
+                      <a:tailEnd type="none" w="med" len="med"/>
+                    </a:lnB>
+                    <a:noFill/>
+                  </a:tcPr>
+                </a:tc>
+                <a:tc>
+                  <a:txBody>
+                    <a:bodyPr/>
+                    <a:lstStyle/>
+                    <a:p>
+                      <a:pPr algn="ctr" fontAlgn="ctr">
+                        <a:buNone/>
+                      </a:pPr>
+                      <a:r>
+                        <a:rPr lang="en-US" sz="900" b="1" i="0" u="none" strike="noStrike" dirty="0">
+                          <a:solidFill>
+                            <a:srgbClr val="000000"/>
+                          </a:solidFill>
+                          <a:effectLst/>
+                          <a:latin typeface="等线" panose="02010600030101010101" pitchFamily="2" charset="-122"/>
+                          <a:ea typeface="等线" panose="02010600030101010101" pitchFamily="2" charset="-122"/>
+                        </a:rPr>
+                        <a:t>70w</a:t>
+                      </a:r>
+                      <a:r>
+                        <a:rPr lang="zh-CN" altLang="en-US" sz="900" b="1" i="0" u="none" strike="noStrike" dirty="0">
+                          <a:solidFill>
+                            <a:srgbClr val="000000"/>
+                          </a:solidFill>
+                          <a:effectLst/>
+                          <a:latin typeface="等线" panose="02010600030101010101" pitchFamily="2" charset="-122"/>
+                          <a:ea typeface="等线" panose="02010600030101010101" pitchFamily="2" charset="-122"/>
+                        </a:rPr>
+                        <a:t>以上</a:t>
+                      </a:r>
+                    </a:p>
+                  </a:txBody>
+                  <a:tcPr marL="3097" marR="3097" marT="3097" marB="0" anchor="ctr">
+                    <a:lnL w="12700" cap="flat" cmpd="sng" algn="ctr">
+                      <a:solidFill>
+                        <a:schemeClr val="tx1"/>
+                      </a:solidFill>
+                      <a:prstDash val="solid"/>
+                      <a:round/>
+                      <a:headEnd type="none" w="med" len="med"/>
+                      <a:tailEnd type="none" w="med" len="med"/>
+                    </a:lnL>
+                    <a:lnR w="12700" cap="flat" cmpd="sng" algn="ctr">
+                      <a:solidFill>
+                        <a:schemeClr val="tx1"/>
+                      </a:solidFill>
+                      <a:prstDash val="solid"/>
+                      <a:round/>
+                      <a:headEnd type="none" w="med" len="med"/>
+                      <a:tailEnd type="none" w="med" len="med"/>
+                    </a:lnR>
+                    <a:lnT w="12700" cap="flat" cmpd="sng" algn="ctr">
+                      <a:solidFill>
+                        <a:schemeClr val="tx1"/>
+                      </a:solidFill>
+                      <a:prstDash val="solid"/>
+                      <a:round/>
+                      <a:headEnd type="none" w="med" len="med"/>
+                      <a:tailEnd type="none" w="med" len="med"/>
+                    </a:lnT>
+                    <a:lnB w="12700" cap="flat" cmpd="sng" algn="ctr">
+                      <a:solidFill>
+                        <a:schemeClr val="tx1"/>
+                      </a:solidFill>
+                      <a:prstDash val="solid"/>
+                      <a:round/>
+                      <a:headEnd type="none" w="med" len="med"/>
+                      <a:tailEnd type="none" w="med" len="med"/>
+                    </a:lnB>
+                    <a:noFill/>
+                  </a:tcPr>
+                </a:tc>
+                <a:tc>
+                  <a:txBody>
+                    <a:bodyPr/>
+                    <a:lstStyle/>
+                    <a:p>
+                      <a:pPr algn="ctr" fontAlgn="ctr">
+                        <a:buNone/>
+                      </a:pPr>
+                      <a:r>
+                        <a:rPr lang="zh-CN" altLang="en-US" sz="900" b="1" i="0" u="none" strike="noStrike">
+                          <a:solidFill>
+                            <a:srgbClr val="000000"/>
+                          </a:solidFill>
+                          <a:effectLst/>
+                          <a:latin typeface="等线" panose="02010600030101010101" pitchFamily="2" charset="-122"/>
+                          <a:ea typeface="等线" panose="02010600030101010101" pitchFamily="2" charset="-122"/>
+                        </a:rPr>
+                        <a:t>基于</a:t>
+                      </a:r>
+                      <a:r>
+                        <a:rPr lang="en-US" sz="900" b="1" i="0" u="none" strike="noStrike">
+                          <a:solidFill>
+                            <a:srgbClr val="000000"/>
+                          </a:solidFill>
+                          <a:effectLst/>
+                          <a:latin typeface="等线" panose="02010600030101010101" pitchFamily="2" charset="-122"/>
+                          <a:ea typeface="等线" panose="02010600030101010101" pitchFamily="2" charset="-122"/>
+                        </a:rPr>
+                        <a:t>Transformer</a:t>
+                      </a:r>
+                    </a:p>
+                  </a:txBody>
+                  <a:tcPr marL="3097" marR="3097" marT="3097" marB="0" anchor="ctr">
+                    <a:lnL w="12700" cap="flat" cmpd="sng" algn="ctr">
+                      <a:solidFill>
+                        <a:schemeClr val="tx1"/>
+                      </a:solidFill>
+                      <a:prstDash val="solid"/>
+                      <a:round/>
+                      <a:headEnd type="none" w="med" len="med"/>
+                      <a:tailEnd type="none" w="med" len="med"/>
+                    </a:lnL>
+                    <a:lnR w="12700" cap="flat" cmpd="sng" algn="ctr">
+                      <a:solidFill>
+                        <a:schemeClr val="tx1"/>
+                      </a:solidFill>
+                      <a:prstDash val="solid"/>
+                      <a:round/>
+                      <a:headEnd type="none" w="med" len="med"/>
+                      <a:tailEnd type="none" w="med" len="med"/>
+                    </a:lnR>
+                    <a:lnT w="12700" cap="flat" cmpd="sng" algn="ctr">
+                      <a:solidFill>
+                        <a:schemeClr val="tx1"/>
+                      </a:solidFill>
+                      <a:prstDash val="solid"/>
+                      <a:round/>
+                      <a:headEnd type="none" w="med" len="med"/>
+                      <a:tailEnd type="none" w="med" len="med"/>
+                    </a:lnT>
+                    <a:lnB w="12700" cap="flat" cmpd="sng" algn="ctr">
+                      <a:solidFill>
+                        <a:schemeClr val="tx1"/>
+                      </a:solidFill>
+                      <a:prstDash val="solid"/>
+                      <a:round/>
+                      <a:headEnd type="none" w="med" len="med"/>
+                      <a:tailEnd type="none" w="med" len="med"/>
+                    </a:lnB>
+                    <a:noFill/>
+                  </a:tcPr>
+                </a:tc>
+                <a:extLst>
+                  <a:ext uri="{0D108BD9-81ED-4DB2-BD59-A6C34878D82A}">
+                    <a16:rowId xmlns:a16="http://schemas.microsoft.com/office/drawing/2014/main" val="2415742291"/>
+                  </a:ext>
+                </a:extLst>
+              </a:tr>
+              <a:tr h="820715">
+                <a:tc>
+                  <a:txBody>
+                    <a:bodyPr/>
+                    <a:lstStyle/>
+                    <a:p>
+                      <a:pPr algn="ctr" fontAlgn="ctr">
+                        <a:buNone/>
+                      </a:pPr>
+                      <a:r>
+                        <a:rPr lang="en-US" sz="900" b="1" i="0" u="none" strike="noStrike" dirty="0">
+                          <a:solidFill>
+                            <a:srgbClr val="000000"/>
+                          </a:solidFill>
+                          <a:effectLst/>
+                          <a:latin typeface="等线" panose="02010600030101010101" pitchFamily="2" charset="-122"/>
+                          <a:ea typeface="等线" panose="02010600030101010101" pitchFamily="2" charset="-122"/>
+                        </a:rPr>
+                        <a:t>Radio DINO: A foundation model for advanced radiomics and AI-driven medical imaging analysis</a:t>
+                      </a:r>
+                    </a:p>
+                  </a:txBody>
+                  <a:tcPr marL="3097" marR="3097" marT="3097" marB="0" anchor="ctr">
+                    <a:lnL w="12700" cap="flat" cmpd="sng" algn="ctr">
+                      <a:solidFill>
+                        <a:schemeClr val="tx1"/>
+                      </a:solidFill>
+                      <a:prstDash val="solid"/>
+                      <a:round/>
+                      <a:headEnd type="none" w="med" len="med"/>
+                      <a:tailEnd type="none" w="med" len="med"/>
+                    </a:lnL>
+                    <a:lnR w="12700" cap="flat" cmpd="sng" algn="ctr">
+                      <a:solidFill>
+                        <a:schemeClr val="tx1"/>
+                      </a:solidFill>
+                      <a:prstDash val="solid"/>
+                      <a:round/>
+                      <a:headEnd type="none" w="med" len="med"/>
+                      <a:tailEnd type="none" w="med" len="med"/>
+                    </a:lnR>
+                    <a:lnT w="12700" cap="flat" cmpd="sng" algn="ctr">
+                      <a:solidFill>
+                        <a:schemeClr val="tx1"/>
+                      </a:solidFill>
+                      <a:prstDash val="solid"/>
+                      <a:round/>
+                      <a:headEnd type="none" w="med" len="med"/>
+                      <a:tailEnd type="none" w="med" len="med"/>
+                    </a:lnT>
+                    <a:lnB w="12700" cap="flat" cmpd="sng" algn="ctr">
+                      <a:solidFill>
+                        <a:schemeClr val="tx1"/>
+                      </a:solidFill>
+                      <a:prstDash val="solid"/>
+                      <a:round/>
+                      <a:headEnd type="none" w="med" len="med"/>
+                      <a:tailEnd type="none" w="med" len="med"/>
+                    </a:lnB>
+                    <a:noFill/>
+                  </a:tcPr>
+                </a:tc>
+                <a:tc>
+                  <a:txBody>
+                    <a:bodyPr/>
+                    <a:lstStyle/>
+                    <a:p>
+                      <a:pPr algn="ctr" fontAlgn="ctr">
+                        <a:buNone/>
+                      </a:pPr>
+                      <a:r>
+                        <a:rPr lang="en-US" altLang="zh-CN" sz="900" b="1" i="0" u="none" strike="noStrike" dirty="0">
+                          <a:solidFill>
+                            <a:srgbClr val="000000"/>
+                          </a:solidFill>
+                          <a:effectLst/>
+                          <a:latin typeface="等线" panose="02010600030101010101" pitchFamily="2" charset="-122"/>
+                          <a:ea typeface="等线" panose="02010600030101010101" pitchFamily="2" charset="-122"/>
+                        </a:rPr>
+                        <a:t>2025</a:t>
+                      </a:r>
+                    </a:p>
+                  </a:txBody>
+                  <a:tcPr marL="3097" marR="3097" marT="3097" marB="0" anchor="ctr">
+                    <a:lnL w="12700" cap="flat" cmpd="sng" algn="ctr">
+                      <a:solidFill>
+                        <a:schemeClr val="tx1"/>
+                      </a:solidFill>
+                      <a:prstDash val="solid"/>
+                      <a:round/>
+                      <a:headEnd type="none" w="med" len="med"/>
+                      <a:tailEnd type="none" w="med" len="med"/>
+                    </a:lnL>
+                    <a:lnR w="12700" cap="flat" cmpd="sng" algn="ctr">
+                      <a:solidFill>
+                        <a:schemeClr val="tx1"/>
+                      </a:solidFill>
+                      <a:prstDash val="solid"/>
+                      <a:round/>
+                      <a:headEnd type="none" w="med" len="med"/>
+                      <a:tailEnd type="none" w="med" len="med"/>
+                    </a:lnR>
+                    <a:lnT w="12700" cap="flat" cmpd="sng" algn="ctr">
+                      <a:solidFill>
+                        <a:schemeClr val="tx1"/>
+                      </a:solidFill>
+                      <a:prstDash val="solid"/>
+                      <a:round/>
+                      <a:headEnd type="none" w="med" len="med"/>
+                      <a:tailEnd type="none" w="med" len="med"/>
+                    </a:lnT>
+                    <a:lnB w="12700" cap="flat" cmpd="sng" algn="ctr">
+                      <a:solidFill>
+                        <a:schemeClr val="tx1"/>
+                      </a:solidFill>
+                      <a:prstDash val="solid"/>
+                      <a:round/>
+                      <a:headEnd type="none" w="med" len="med"/>
+                      <a:tailEnd type="none" w="med" len="med"/>
+                    </a:lnB>
+                    <a:noFill/>
+                  </a:tcPr>
+                </a:tc>
+                <a:tc>
+                  <a:txBody>
+                    <a:bodyPr/>
+                    <a:lstStyle/>
+                    <a:p>
+                      <a:pPr algn="ctr" fontAlgn="ctr">
+                        <a:buNone/>
+                      </a:pPr>
+                      <a:br>
+                        <a:rPr lang="en-US" sz="900" b="1" i="0" u="none" strike="noStrike">
+                          <a:solidFill>
+                            <a:srgbClr val="000000"/>
+                          </a:solidFill>
+                          <a:effectLst/>
+                          <a:latin typeface="等线" panose="02010600030101010101" pitchFamily="2" charset="-122"/>
+                          <a:ea typeface="等线" panose="02010600030101010101" pitchFamily="2" charset="-122"/>
+                        </a:rPr>
+                      </a:br>
+                      <a:r>
+                        <a:rPr lang="en-US" sz="900" b="1" i="0" u="none" strike="noStrike">
+                          <a:solidFill>
+                            <a:srgbClr val="000000"/>
+                          </a:solidFill>
+                          <a:effectLst/>
+                          <a:latin typeface="等线" panose="02010600030101010101" pitchFamily="2" charset="-122"/>
+                          <a:ea typeface="等线" panose="02010600030101010101" pitchFamily="2" charset="-122"/>
+                        </a:rPr>
+                        <a:t>Computers in Biology and Medicine</a:t>
+                      </a:r>
+                    </a:p>
+                  </a:txBody>
+                  <a:tcPr marL="3097" marR="3097" marT="3097" marB="0" anchor="ctr">
+                    <a:lnL w="12700" cap="flat" cmpd="sng" algn="ctr">
+                      <a:solidFill>
+                        <a:schemeClr val="tx1"/>
+                      </a:solidFill>
+                      <a:prstDash val="solid"/>
+                      <a:round/>
+                      <a:headEnd type="none" w="med" len="med"/>
+                      <a:tailEnd type="none" w="med" len="med"/>
+                    </a:lnL>
+                    <a:lnR w="12700" cap="flat" cmpd="sng" algn="ctr">
+                      <a:solidFill>
+                        <a:schemeClr val="tx1"/>
+                      </a:solidFill>
+                      <a:prstDash val="solid"/>
+                      <a:round/>
+                      <a:headEnd type="none" w="med" len="med"/>
+                      <a:tailEnd type="none" w="med" len="med"/>
+                    </a:lnR>
+                    <a:lnT w="12700" cap="flat" cmpd="sng" algn="ctr">
+                      <a:solidFill>
+                        <a:schemeClr val="tx1"/>
+                      </a:solidFill>
+                      <a:prstDash val="solid"/>
+                      <a:round/>
+                      <a:headEnd type="none" w="med" len="med"/>
+                      <a:tailEnd type="none" w="med" len="med"/>
+                    </a:lnT>
+                    <a:lnB w="12700" cap="flat" cmpd="sng" algn="ctr">
+                      <a:solidFill>
+                        <a:schemeClr val="tx1"/>
+                      </a:solidFill>
+                      <a:prstDash val="solid"/>
+                      <a:round/>
+                      <a:headEnd type="none" w="med" len="med"/>
+                      <a:tailEnd type="none" w="med" len="med"/>
+                    </a:lnB>
+                    <a:noFill/>
+                  </a:tcPr>
+                </a:tc>
+                <a:tc>
+                  <a:txBody>
+                    <a:bodyPr/>
+                    <a:lstStyle/>
+                    <a:p>
+                      <a:pPr algn="ctr" fontAlgn="ctr">
+                        <a:buNone/>
+                      </a:pPr>
+                      <a:r>
+                        <a:rPr lang="en-US" altLang="zh-CN" sz="900" b="1" i="0" u="none" strike="noStrike" dirty="0">
+                          <a:solidFill>
+                            <a:srgbClr val="000000"/>
+                          </a:solidFill>
+                          <a:effectLst/>
+                          <a:latin typeface="等线" panose="02010600030101010101" pitchFamily="2" charset="-122"/>
+                          <a:ea typeface="等线" panose="02010600030101010101" pitchFamily="2" charset="-122"/>
+                        </a:rPr>
+                        <a:t>13</a:t>
+                      </a:r>
+                    </a:p>
+                  </a:txBody>
+                  <a:tcPr marL="3097" marR="3097" marT="3097" marB="0" anchor="ctr">
+                    <a:lnL w="12700" cap="flat" cmpd="sng" algn="ctr">
+                      <a:solidFill>
+                        <a:schemeClr val="tx1"/>
+                      </a:solidFill>
+                      <a:prstDash val="solid"/>
+                      <a:round/>
+                      <a:headEnd type="none" w="med" len="med"/>
+                      <a:tailEnd type="none" w="med" len="med"/>
+                    </a:lnL>
+                    <a:lnR w="12700" cap="flat" cmpd="sng" algn="ctr">
+                      <a:solidFill>
+                        <a:schemeClr val="tx1"/>
+                      </a:solidFill>
+                      <a:prstDash val="solid"/>
+                      <a:round/>
+                      <a:headEnd type="none" w="med" len="med"/>
+                      <a:tailEnd type="none" w="med" len="med"/>
+                    </a:lnR>
+                    <a:lnT w="12700" cap="flat" cmpd="sng" algn="ctr">
+                      <a:solidFill>
+                        <a:schemeClr val="tx1"/>
+                      </a:solidFill>
+                      <a:prstDash val="solid"/>
+                      <a:round/>
+                      <a:headEnd type="none" w="med" len="med"/>
+                      <a:tailEnd type="none" w="med" len="med"/>
+                    </a:lnT>
+                    <a:lnB w="12700" cap="flat" cmpd="sng" algn="ctr">
+                      <a:solidFill>
+                        <a:schemeClr val="tx1"/>
+                      </a:solidFill>
+                      <a:prstDash val="solid"/>
+                      <a:round/>
+                      <a:headEnd type="none" w="med" len="med"/>
+                      <a:tailEnd type="none" w="med" len="med"/>
+                    </a:lnB>
+                    <a:noFill/>
+                  </a:tcPr>
+                </a:tc>
+                <a:tc>
+                  <a:txBody>
+                    <a:bodyPr/>
+                    <a:lstStyle/>
+                    <a:p>
+                      <a:pPr algn="ctr" fontAlgn="ctr">
+                        <a:buNone/>
+                      </a:pPr>
+                      <a:r>
+                        <a:rPr lang="zh-CN" altLang="en-US" sz="900" b="1" i="0" u="none" strike="noStrike">
+                          <a:solidFill>
+                            <a:srgbClr val="000000"/>
+                          </a:solidFill>
+                          <a:effectLst/>
+                          <a:latin typeface="等线" panose="02010600030101010101" pitchFamily="2" charset="-122"/>
+                          <a:ea typeface="等线" panose="02010600030101010101" pitchFamily="2" charset="-122"/>
+                        </a:rPr>
+                        <a:t>多模态数据集</a:t>
+                      </a:r>
+                    </a:p>
+                  </a:txBody>
+                  <a:tcPr marL="3097" marR="3097" marT="3097" marB="0" anchor="ctr">
+                    <a:lnL w="12700" cap="flat" cmpd="sng" algn="ctr">
+                      <a:solidFill>
+                        <a:schemeClr val="tx1"/>
+                      </a:solidFill>
+                      <a:prstDash val="solid"/>
+                      <a:round/>
+                      <a:headEnd type="none" w="med" len="med"/>
+                      <a:tailEnd type="none" w="med" len="med"/>
+                    </a:lnL>
+                    <a:lnR w="12700" cap="flat" cmpd="sng" algn="ctr">
+                      <a:solidFill>
+                        <a:schemeClr val="tx1"/>
+                      </a:solidFill>
+                      <a:prstDash val="solid"/>
+                      <a:round/>
+                      <a:headEnd type="none" w="med" len="med"/>
+                      <a:tailEnd type="none" w="med" len="med"/>
+                    </a:lnR>
+                    <a:lnT w="12700" cap="flat" cmpd="sng" algn="ctr">
+                      <a:solidFill>
+                        <a:schemeClr val="tx1"/>
+                      </a:solidFill>
+                      <a:prstDash val="solid"/>
+                      <a:round/>
+                      <a:headEnd type="none" w="med" len="med"/>
+                      <a:tailEnd type="none" w="med" len="med"/>
+                    </a:lnT>
+                    <a:lnB w="12700" cap="flat" cmpd="sng" algn="ctr">
+                      <a:solidFill>
+                        <a:schemeClr val="tx1"/>
+                      </a:solidFill>
+                      <a:prstDash val="solid"/>
+                      <a:round/>
+                      <a:headEnd type="none" w="med" len="med"/>
+                      <a:tailEnd type="none" w="med" len="med"/>
+                    </a:lnB>
+                    <a:noFill/>
+                  </a:tcPr>
+                </a:tc>
+                <a:tc>
+                  <a:txBody>
+                    <a:bodyPr/>
+                    <a:lstStyle/>
+                    <a:p>
+                      <a:pPr algn="ctr" fontAlgn="ctr">
+                        <a:buNone/>
+                      </a:pPr>
+                      <a:r>
+                        <a:rPr lang="en-US" sz="900" b="1" i="0" u="none" strike="noStrike" dirty="0">
+                          <a:solidFill>
+                            <a:srgbClr val="000000"/>
+                          </a:solidFill>
+                          <a:effectLst/>
+                          <a:latin typeface="等线" panose="02010600030101010101" pitchFamily="2" charset="-122"/>
+                          <a:ea typeface="等线" panose="02010600030101010101" pitchFamily="2" charset="-122"/>
+                        </a:rPr>
+                        <a:t>100w</a:t>
+                      </a:r>
+                      <a:r>
+                        <a:rPr lang="zh-CN" altLang="en-US" sz="900" b="1" i="0" u="none" strike="noStrike" dirty="0">
+                          <a:solidFill>
+                            <a:srgbClr val="000000"/>
+                          </a:solidFill>
+                          <a:effectLst/>
+                          <a:latin typeface="等线" panose="02010600030101010101" pitchFamily="2" charset="-122"/>
+                          <a:ea typeface="等线" panose="02010600030101010101" pitchFamily="2" charset="-122"/>
+                        </a:rPr>
+                        <a:t>以上</a:t>
+                      </a:r>
+                    </a:p>
+                  </a:txBody>
+                  <a:tcPr marL="3097" marR="3097" marT="3097" marB="0" anchor="ctr">
+                    <a:lnL w="12700" cap="flat" cmpd="sng" algn="ctr">
+                      <a:solidFill>
+                        <a:schemeClr val="tx1"/>
+                      </a:solidFill>
+                      <a:prstDash val="solid"/>
+                      <a:round/>
+                      <a:headEnd type="none" w="med" len="med"/>
+                      <a:tailEnd type="none" w="med" len="med"/>
+                    </a:lnL>
+                    <a:lnR w="12700" cap="flat" cmpd="sng" algn="ctr">
+                      <a:solidFill>
+                        <a:schemeClr val="tx1"/>
+                      </a:solidFill>
+                      <a:prstDash val="solid"/>
+                      <a:round/>
+                      <a:headEnd type="none" w="med" len="med"/>
+                      <a:tailEnd type="none" w="med" len="med"/>
+                    </a:lnR>
+                    <a:lnT w="12700" cap="flat" cmpd="sng" algn="ctr">
+                      <a:solidFill>
+                        <a:schemeClr val="tx1"/>
+                      </a:solidFill>
+                      <a:prstDash val="solid"/>
+                      <a:round/>
+                      <a:headEnd type="none" w="med" len="med"/>
+                      <a:tailEnd type="none" w="med" len="med"/>
+                    </a:lnT>
+                    <a:lnB w="12700" cap="flat" cmpd="sng" algn="ctr">
+                      <a:solidFill>
+                        <a:schemeClr val="tx1"/>
+                      </a:solidFill>
+                      <a:prstDash val="solid"/>
+                      <a:round/>
+                      <a:headEnd type="none" w="med" len="med"/>
+                      <a:tailEnd type="none" w="med" len="med"/>
+                    </a:lnB>
+                    <a:noFill/>
+                  </a:tcPr>
+                </a:tc>
+                <a:tc>
+                  <a:txBody>
+                    <a:bodyPr/>
+                    <a:lstStyle/>
+                    <a:p>
+                      <a:pPr algn="ctr" fontAlgn="ctr">
+                        <a:buNone/>
+                      </a:pPr>
+                      <a:r>
+                        <a:rPr lang="en-US" sz="900" b="1" i="0" u="none" strike="noStrike">
+                          <a:solidFill>
+                            <a:srgbClr val="000000"/>
+                          </a:solidFill>
+                          <a:effectLst/>
+                          <a:latin typeface="等线" panose="02010600030101010101" pitchFamily="2" charset="-122"/>
+                          <a:ea typeface="等线" panose="02010600030101010101" pitchFamily="2" charset="-122"/>
+                        </a:rPr>
+                        <a:t>Vision Transformer（ViT）</a:t>
+                      </a:r>
+                      <a:r>
+                        <a:rPr lang="zh-CN" altLang="en-US" sz="900" b="1" i="0" u="none" strike="noStrike">
+                          <a:solidFill>
+                            <a:srgbClr val="000000"/>
+                          </a:solidFill>
+                          <a:effectLst/>
+                          <a:latin typeface="等线" panose="02010600030101010101" pitchFamily="2" charset="-122"/>
+                          <a:ea typeface="等线" panose="02010600030101010101" pitchFamily="2" charset="-122"/>
+                        </a:rPr>
+                        <a:t>为骨干的</a:t>
+                      </a:r>
+                      <a:r>
+                        <a:rPr lang="en-US" sz="900" b="1" i="0" u="none" strike="noStrike">
+                          <a:solidFill>
+                            <a:srgbClr val="000000"/>
+                          </a:solidFill>
+                          <a:effectLst/>
+                          <a:latin typeface="等线" panose="02010600030101010101" pitchFamily="2" charset="-122"/>
+                          <a:ea typeface="等线" panose="02010600030101010101" pitchFamily="2" charset="-122"/>
+                        </a:rPr>
+                        <a:t>DINO</a:t>
+                      </a:r>
+                      <a:r>
+                        <a:rPr lang="zh-CN" altLang="en-US" sz="900" b="1" i="0" u="none" strike="noStrike">
+                          <a:solidFill>
+                            <a:srgbClr val="000000"/>
+                          </a:solidFill>
+                          <a:effectLst/>
+                          <a:latin typeface="等线" panose="02010600030101010101" pitchFamily="2" charset="-122"/>
+                          <a:ea typeface="等线" panose="02010600030101010101" pitchFamily="2" charset="-122"/>
+                        </a:rPr>
+                        <a:t>网络</a:t>
+                      </a:r>
+                    </a:p>
+                  </a:txBody>
+                  <a:tcPr marL="3097" marR="3097" marT="3097" marB="0" anchor="ctr">
+                    <a:lnL w="12700" cap="flat" cmpd="sng" algn="ctr">
+                      <a:solidFill>
+                        <a:schemeClr val="tx1"/>
+                      </a:solidFill>
+                      <a:prstDash val="solid"/>
+                      <a:round/>
+                      <a:headEnd type="none" w="med" len="med"/>
+                      <a:tailEnd type="none" w="med" len="med"/>
+                    </a:lnL>
+                    <a:lnR w="12700" cap="flat" cmpd="sng" algn="ctr">
+                      <a:solidFill>
+                        <a:schemeClr val="tx1"/>
+                      </a:solidFill>
+                      <a:prstDash val="solid"/>
+                      <a:round/>
+                      <a:headEnd type="none" w="med" len="med"/>
+                      <a:tailEnd type="none" w="med" len="med"/>
+                    </a:lnR>
+                    <a:lnT w="12700" cap="flat" cmpd="sng" algn="ctr">
+                      <a:solidFill>
+                        <a:schemeClr val="tx1"/>
+                      </a:solidFill>
+                      <a:prstDash val="solid"/>
+                      <a:round/>
+                      <a:headEnd type="none" w="med" len="med"/>
+                      <a:tailEnd type="none" w="med" len="med"/>
+                    </a:lnT>
+                    <a:lnB w="12700" cap="flat" cmpd="sng" algn="ctr">
+                      <a:solidFill>
+                        <a:schemeClr val="tx1"/>
+                      </a:solidFill>
+                      <a:prstDash val="solid"/>
+                      <a:round/>
+                      <a:headEnd type="none" w="med" len="med"/>
+                      <a:tailEnd type="none" w="med" len="med"/>
+                    </a:lnB>
+                    <a:noFill/>
+                  </a:tcPr>
+                </a:tc>
+                <a:extLst>
+                  <a:ext uri="{0D108BD9-81ED-4DB2-BD59-A6C34878D82A}">
+                    <a16:rowId xmlns:a16="http://schemas.microsoft.com/office/drawing/2014/main" val="99239511"/>
+                  </a:ext>
+                </a:extLst>
+              </a:tr>
+              <a:tr h="1025119">
+                <a:tc>
+                  <a:txBody>
+                    <a:bodyPr/>
+                    <a:lstStyle/>
+                    <a:p>
+                      <a:pPr algn="ctr" fontAlgn="ctr">
+                        <a:buNone/>
+                      </a:pPr>
+                      <a:r>
+                        <a:rPr lang="en-US" sz="900" b="1" i="0" u="none" strike="noStrike">
+                          <a:solidFill>
+                            <a:srgbClr val="000000"/>
+                          </a:solidFill>
+                          <a:effectLst/>
+                          <a:latin typeface="等线" panose="02010600030101010101" pitchFamily="2" charset="-122"/>
+                          <a:ea typeface="等线" panose="02010600030101010101" pitchFamily="2" charset="-122"/>
+                        </a:rPr>
+                        <a:t>A foundation model for generalizable cancer diagnosis and survival prediction from histopathological images</a:t>
+                      </a:r>
+                    </a:p>
+                  </a:txBody>
+                  <a:tcPr marL="3097" marR="3097" marT="3097" marB="0" anchor="ctr">
+                    <a:lnL w="12700" cap="flat" cmpd="sng" algn="ctr">
+                      <a:solidFill>
+                        <a:schemeClr val="tx1"/>
+                      </a:solidFill>
+                      <a:prstDash val="solid"/>
+                      <a:round/>
+                      <a:headEnd type="none" w="med" len="med"/>
+                      <a:tailEnd type="none" w="med" len="med"/>
+                    </a:lnL>
+                    <a:lnR w="12700" cap="flat" cmpd="sng" algn="ctr">
+                      <a:solidFill>
+                        <a:schemeClr val="tx1"/>
+                      </a:solidFill>
+                      <a:prstDash val="solid"/>
+                      <a:round/>
+                      <a:headEnd type="none" w="med" len="med"/>
+                      <a:tailEnd type="none" w="med" len="med"/>
+                    </a:lnR>
+                    <a:lnT w="12700" cap="flat" cmpd="sng" algn="ctr">
+                      <a:solidFill>
+                        <a:schemeClr val="tx1"/>
+                      </a:solidFill>
+                      <a:prstDash val="solid"/>
+                      <a:round/>
+                      <a:headEnd type="none" w="med" len="med"/>
+                      <a:tailEnd type="none" w="med" len="med"/>
+                    </a:lnT>
+                    <a:lnB w="12700" cap="flat" cmpd="sng" algn="ctr">
+                      <a:solidFill>
+                        <a:schemeClr val="tx1"/>
+                      </a:solidFill>
+                      <a:prstDash val="solid"/>
+                      <a:round/>
+                      <a:headEnd type="none" w="med" len="med"/>
+                      <a:tailEnd type="none" w="med" len="med"/>
+                    </a:lnB>
+                    <a:noFill/>
+                  </a:tcPr>
+                </a:tc>
+                <a:tc>
+                  <a:txBody>
+                    <a:bodyPr/>
+                    <a:lstStyle/>
+                    <a:p>
+                      <a:pPr algn="ctr" fontAlgn="ctr">
+                        <a:buNone/>
+                      </a:pPr>
+                      <a:r>
+                        <a:rPr lang="en-US" altLang="zh-CN" sz="900" b="1" i="0" u="none" strike="noStrike" dirty="0">
+                          <a:solidFill>
+                            <a:srgbClr val="000000"/>
+                          </a:solidFill>
+                          <a:effectLst/>
+                          <a:latin typeface="等线" panose="02010600030101010101" pitchFamily="2" charset="-122"/>
+                          <a:ea typeface="等线" panose="02010600030101010101" pitchFamily="2" charset="-122"/>
+                        </a:rPr>
+                        <a:t>2025</a:t>
+                      </a:r>
+                    </a:p>
+                  </a:txBody>
+                  <a:tcPr marL="3097" marR="3097" marT="3097" marB="0" anchor="ctr">
+                    <a:lnL w="12700" cap="flat" cmpd="sng" algn="ctr">
+                      <a:solidFill>
+                        <a:schemeClr val="tx1"/>
+                      </a:solidFill>
+                      <a:prstDash val="solid"/>
+                      <a:round/>
+                      <a:headEnd type="none" w="med" len="med"/>
+                      <a:tailEnd type="none" w="med" len="med"/>
+                    </a:lnL>
+                    <a:lnR w="12700" cap="flat" cmpd="sng" algn="ctr">
+                      <a:solidFill>
+                        <a:schemeClr val="tx1"/>
+                      </a:solidFill>
+                      <a:prstDash val="solid"/>
+                      <a:round/>
+                      <a:headEnd type="none" w="med" len="med"/>
+                      <a:tailEnd type="none" w="med" len="med"/>
+                    </a:lnR>
+                    <a:lnT w="12700" cap="flat" cmpd="sng" algn="ctr">
+                      <a:solidFill>
+                        <a:schemeClr val="tx1"/>
+                      </a:solidFill>
+                      <a:prstDash val="solid"/>
+                      <a:round/>
+                      <a:headEnd type="none" w="med" len="med"/>
+                      <a:tailEnd type="none" w="med" len="med"/>
+                    </a:lnT>
+                    <a:lnB w="12700" cap="flat" cmpd="sng" algn="ctr">
+                      <a:solidFill>
+                        <a:schemeClr val="tx1"/>
+                      </a:solidFill>
+                      <a:prstDash val="solid"/>
+                      <a:round/>
+                      <a:headEnd type="none" w="med" len="med"/>
+                      <a:tailEnd type="none" w="med" len="med"/>
+                    </a:lnB>
+                    <a:noFill/>
+                  </a:tcPr>
+                </a:tc>
+                <a:tc>
+                  <a:txBody>
+                    <a:bodyPr/>
+                    <a:lstStyle/>
+                    <a:p>
+                      <a:pPr algn="ctr" fontAlgn="ctr">
+                        <a:buNone/>
+                      </a:pPr>
+                      <a:r>
+                        <a:rPr lang="en-US" sz="900" b="1" i="0" u="none" strike="noStrike">
+                          <a:solidFill>
+                            <a:srgbClr val="000000"/>
+                          </a:solidFill>
+                          <a:effectLst/>
+                          <a:latin typeface="等线" panose="02010600030101010101" pitchFamily="2" charset="-122"/>
+                          <a:ea typeface="等线" panose="02010600030101010101" pitchFamily="2" charset="-122"/>
+                        </a:rPr>
+                        <a:t>nature communications</a:t>
+                      </a:r>
+                    </a:p>
+                  </a:txBody>
+                  <a:tcPr marL="3097" marR="3097" marT="3097" marB="0" anchor="ctr">
+                    <a:lnL w="12700" cap="flat" cmpd="sng" algn="ctr">
+                      <a:solidFill>
+                        <a:schemeClr val="tx1"/>
+                      </a:solidFill>
+                      <a:prstDash val="solid"/>
+                      <a:round/>
+                      <a:headEnd type="none" w="med" len="med"/>
+                      <a:tailEnd type="none" w="med" len="med"/>
+                    </a:lnL>
+                    <a:lnR w="12700" cap="flat" cmpd="sng" algn="ctr">
+                      <a:solidFill>
+                        <a:schemeClr val="tx1"/>
+                      </a:solidFill>
+                      <a:prstDash val="solid"/>
+                      <a:round/>
+                      <a:headEnd type="none" w="med" len="med"/>
+                      <a:tailEnd type="none" w="med" len="med"/>
+                    </a:lnR>
+                    <a:lnT w="12700" cap="flat" cmpd="sng" algn="ctr">
+                      <a:solidFill>
+                        <a:schemeClr val="tx1"/>
+                      </a:solidFill>
+                      <a:prstDash val="solid"/>
+                      <a:round/>
+                      <a:headEnd type="none" w="med" len="med"/>
+                      <a:tailEnd type="none" w="med" len="med"/>
+                    </a:lnT>
+                    <a:lnB w="12700" cap="flat" cmpd="sng" algn="ctr">
+                      <a:solidFill>
+                        <a:schemeClr val="tx1"/>
+                      </a:solidFill>
+                      <a:prstDash val="solid"/>
+                      <a:round/>
+                      <a:headEnd type="none" w="med" len="med"/>
+                      <a:tailEnd type="none" w="med" len="med"/>
+                    </a:lnB>
+                    <a:noFill/>
+                  </a:tcPr>
+                </a:tc>
+                <a:tc>
+                  <a:txBody>
+                    <a:bodyPr/>
+                    <a:lstStyle/>
+                    <a:p>
+                      <a:pPr algn="ctr" fontAlgn="ctr">
+                        <a:buNone/>
+                      </a:pPr>
+                      <a:r>
+                        <a:rPr lang="en-US" altLang="zh-CN" sz="900" b="1" i="0" u="none" strike="noStrike" dirty="0">
+                          <a:solidFill>
+                            <a:srgbClr val="000000"/>
+                          </a:solidFill>
+                          <a:effectLst/>
+                          <a:latin typeface="等线" panose="02010600030101010101" pitchFamily="2" charset="-122"/>
+                          <a:ea typeface="等线" panose="02010600030101010101" pitchFamily="2" charset="-122"/>
+                        </a:rPr>
+                        <a:t>15.7</a:t>
+                      </a:r>
+                    </a:p>
+                  </a:txBody>
+                  <a:tcPr marL="3097" marR="3097" marT="3097" marB="0" anchor="ctr">
+                    <a:lnL w="12700" cap="flat" cmpd="sng" algn="ctr">
+                      <a:solidFill>
+                        <a:schemeClr val="tx1"/>
+                      </a:solidFill>
+                      <a:prstDash val="solid"/>
+                      <a:round/>
+                      <a:headEnd type="none" w="med" len="med"/>
+                      <a:tailEnd type="none" w="med" len="med"/>
+                    </a:lnL>
+                    <a:lnR w="12700" cap="flat" cmpd="sng" algn="ctr">
+                      <a:solidFill>
+                        <a:schemeClr val="tx1"/>
+                      </a:solidFill>
+                      <a:prstDash val="solid"/>
+                      <a:round/>
+                      <a:headEnd type="none" w="med" len="med"/>
+                      <a:tailEnd type="none" w="med" len="med"/>
+                    </a:lnR>
+                    <a:lnT w="12700" cap="flat" cmpd="sng" algn="ctr">
+                      <a:solidFill>
+                        <a:schemeClr val="tx1"/>
+                      </a:solidFill>
+                      <a:prstDash val="solid"/>
+                      <a:round/>
+                      <a:headEnd type="none" w="med" len="med"/>
+                      <a:tailEnd type="none" w="med" len="med"/>
+                    </a:lnT>
+                    <a:lnB w="12700" cap="flat" cmpd="sng" algn="ctr">
+                      <a:solidFill>
+                        <a:schemeClr val="tx1"/>
+                      </a:solidFill>
+                      <a:prstDash val="solid"/>
+                      <a:round/>
+                      <a:headEnd type="none" w="med" len="med"/>
+                      <a:tailEnd type="none" w="med" len="med"/>
+                    </a:lnB>
+                    <a:noFill/>
+                  </a:tcPr>
+                </a:tc>
+                <a:tc>
+                  <a:txBody>
+                    <a:bodyPr/>
+                    <a:lstStyle/>
+                    <a:p>
+                      <a:pPr algn="ctr" fontAlgn="ctr">
+                        <a:buNone/>
+                      </a:pPr>
+                      <a:r>
+                        <a:rPr lang="zh-CN" altLang="en-US" sz="900" b="1" i="0" u="none" strike="noStrike">
+                          <a:solidFill>
+                            <a:srgbClr val="000000"/>
+                          </a:solidFill>
+                          <a:effectLst/>
+                          <a:latin typeface="等线" panose="02010600030101010101" pitchFamily="2" charset="-122"/>
+                          <a:ea typeface="等线" panose="02010600030101010101" pitchFamily="2" charset="-122"/>
+                        </a:rPr>
+                        <a:t>病理组织图像</a:t>
+                      </a:r>
+                    </a:p>
+                  </a:txBody>
+                  <a:tcPr marL="3097" marR="3097" marT="3097" marB="0" anchor="ctr">
+                    <a:lnL w="12700" cap="flat" cmpd="sng" algn="ctr">
+                      <a:solidFill>
+                        <a:schemeClr val="tx1"/>
+                      </a:solidFill>
+                      <a:prstDash val="solid"/>
+                      <a:round/>
+                      <a:headEnd type="none" w="med" len="med"/>
+                      <a:tailEnd type="none" w="med" len="med"/>
+                    </a:lnL>
+                    <a:lnR w="12700" cap="flat" cmpd="sng" algn="ctr">
+                      <a:solidFill>
+                        <a:schemeClr val="tx1"/>
+                      </a:solidFill>
+                      <a:prstDash val="solid"/>
+                      <a:round/>
+                      <a:headEnd type="none" w="med" len="med"/>
+                      <a:tailEnd type="none" w="med" len="med"/>
+                    </a:lnR>
+                    <a:lnT w="12700" cap="flat" cmpd="sng" algn="ctr">
+                      <a:solidFill>
+                        <a:schemeClr val="tx1"/>
+                      </a:solidFill>
+                      <a:prstDash val="solid"/>
+                      <a:round/>
+                      <a:headEnd type="none" w="med" len="med"/>
+                      <a:tailEnd type="none" w="med" len="med"/>
+                    </a:lnT>
+                    <a:lnB w="12700" cap="flat" cmpd="sng" algn="ctr">
+                      <a:solidFill>
+                        <a:schemeClr val="tx1"/>
+                      </a:solidFill>
+                      <a:prstDash val="solid"/>
+                      <a:round/>
+                      <a:headEnd type="none" w="med" len="med"/>
+                      <a:tailEnd type="none" w="med" len="med"/>
+                    </a:lnB>
+                    <a:noFill/>
+                  </a:tcPr>
+                </a:tc>
+                <a:tc>
+                  <a:txBody>
+                    <a:bodyPr/>
+                    <a:lstStyle/>
+                    <a:p>
+                      <a:pPr algn="ctr" fontAlgn="ctr">
+                        <a:buNone/>
+                      </a:pPr>
+                      <a:r>
+                        <a:rPr lang="en-US" altLang="zh-CN" sz="900" b="1" i="0" u="none" strike="noStrike" dirty="0">
+                          <a:solidFill>
+                            <a:srgbClr val="000000"/>
+                          </a:solidFill>
+                          <a:effectLst/>
+                          <a:latin typeface="等线" panose="02010600030101010101" pitchFamily="2" charset="-122"/>
+                          <a:ea typeface="等线" panose="02010600030101010101" pitchFamily="2" charset="-122"/>
+                        </a:rPr>
+                        <a:t>1177</a:t>
+                      </a:r>
+                      <a:r>
+                        <a:rPr lang="zh-CN" altLang="en-US" sz="900" b="1" i="0" u="none" strike="noStrike" dirty="0">
+                          <a:solidFill>
+                            <a:srgbClr val="000000"/>
+                          </a:solidFill>
+                          <a:effectLst/>
+                          <a:latin typeface="等线" panose="02010600030101010101" pitchFamily="2" charset="-122"/>
+                          <a:ea typeface="等线" panose="02010600030101010101" pitchFamily="2" charset="-122"/>
+                        </a:rPr>
+                        <a:t>万</a:t>
+                      </a:r>
+                    </a:p>
+                  </a:txBody>
+                  <a:tcPr marL="3097" marR="3097" marT="3097" marB="0" anchor="ctr">
+                    <a:lnL w="12700" cap="flat" cmpd="sng" algn="ctr">
+                      <a:solidFill>
+                        <a:schemeClr val="tx1"/>
+                      </a:solidFill>
+                      <a:prstDash val="solid"/>
+                      <a:round/>
+                      <a:headEnd type="none" w="med" len="med"/>
+                      <a:tailEnd type="none" w="med" len="med"/>
+                    </a:lnL>
+                    <a:lnR w="12700" cap="flat" cmpd="sng" algn="ctr">
+                      <a:solidFill>
+                        <a:schemeClr val="tx1"/>
+                      </a:solidFill>
+                      <a:prstDash val="solid"/>
+                      <a:round/>
+                      <a:headEnd type="none" w="med" len="med"/>
+                      <a:tailEnd type="none" w="med" len="med"/>
+                    </a:lnR>
+                    <a:lnT w="12700" cap="flat" cmpd="sng" algn="ctr">
+                      <a:solidFill>
+                        <a:schemeClr val="tx1"/>
+                      </a:solidFill>
+                      <a:prstDash val="solid"/>
+                      <a:round/>
+                      <a:headEnd type="none" w="med" len="med"/>
+                      <a:tailEnd type="none" w="med" len="med"/>
+                    </a:lnT>
+                    <a:lnB w="12700" cap="flat" cmpd="sng" algn="ctr">
+                      <a:solidFill>
+                        <a:schemeClr val="tx1"/>
+                      </a:solidFill>
+                      <a:prstDash val="solid"/>
+                      <a:round/>
+                      <a:headEnd type="none" w="med" len="med"/>
+                      <a:tailEnd type="none" w="med" len="med"/>
+                    </a:lnB>
+                    <a:noFill/>
+                  </a:tcPr>
+                </a:tc>
+                <a:tc>
+                  <a:txBody>
+                    <a:bodyPr/>
+                    <a:lstStyle/>
+                    <a:p>
+                      <a:pPr algn="ctr" fontAlgn="ctr">
+                        <a:buNone/>
+                      </a:pPr>
+                      <a:r>
+                        <a:rPr lang="en-US" sz="900" b="1" i="0" u="none" strike="noStrike" dirty="0">
+                          <a:solidFill>
+                            <a:srgbClr val="000000"/>
+                          </a:solidFill>
+                          <a:effectLst/>
+                          <a:latin typeface="等线" panose="02010600030101010101" pitchFamily="2" charset="-122"/>
+                          <a:ea typeface="等线" panose="02010600030101010101" pitchFamily="2" charset="-122"/>
+                        </a:rPr>
+                        <a:t>Masked Image Modeling </a:t>
+                      </a:r>
+                      <a:r>
+                        <a:rPr lang="zh-CN" altLang="en-US" sz="900" b="1" i="0" u="none" strike="noStrike" dirty="0">
+                          <a:solidFill>
+                            <a:srgbClr val="000000"/>
+                          </a:solidFill>
+                          <a:effectLst/>
+                          <a:latin typeface="等线" panose="02010600030101010101" pitchFamily="2" charset="-122"/>
+                          <a:ea typeface="等线" panose="02010600030101010101" pitchFamily="2" charset="-122"/>
+                        </a:rPr>
+                        <a:t>掩码图像建模</a:t>
+                      </a:r>
+                    </a:p>
+                  </a:txBody>
+                  <a:tcPr marL="3097" marR="3097" marT="3097" marB="0" anchor="ctr">
+                    <a:lnL w="12700" cap="flat" cmpd="sng" algn="ctr">
+                      <a:solidFill>
+                        <a:schemeClr val="tx1"/>
+                      </a:solidFill>
+                      <a:prstDash val="solid"/>
+                      <a:round/>
+                      <a:headEnd type="none" w="med" len="med"/>
+                      <a:tailEnd type="none" w="med" len="med"/>
+                    </a:lnL>
+                    <a:lnR w="12700" cap="flat" cmpd="sng" algn="ctr">
+                      <a:solidFill>
+                        <a:schemeClr val="tx1"/>
+                      </a:solidFill>
+                      <a:prstDash val="solid"/>
+                      <a:round/>
+                      <a:headEnd type="none" w="med" len="med"/>
+                      <a:tailEnd type="none" w="med" len="med"/>
+                    </a:lnR>
+                    <a:lnT w="12700" cap="flat" cmpd="sng" algn="ctr">
+                      <a:solidFill>
+                        <a:schemeClr val="tx1"/>
+                      </a:solidFill>
+                      <a:prstDash val="solid"/>
+                      <a:round/>
+                      <a:headEnd type="none" w="med" len="med"/>
+                      <a:tailEnd type="none" w="med" len="med"/>
+                    </a:lnT>
+                    <a:lnB w="12700" cap="flat" cmpd="sng" algn="ctr">
+                      <a:solidFill>
+                        <a:schemeClr val="tx1"/>
+                      </a:solidFill>
+                      <a:prstDash val="solid"/>
+                      <a:round/>
+                      <a:headEnd type="none" w="med" len="med"/>
+                      <a:tailEnd type="none" w="med" len="med"/>
+                    </a:lnB>
+                    <a:noFill/>
+                  </a:tcPr>
+                </a:tc>
+                <a:extLst>
+                  <a:ext uri="{0D108BD9-81ED-4DB2-BD59-A6C34878D82A}">
+                    <a16:rowId xmlns:a16="http://schemas.microsoft.com/office/drawing/2014/main" val="3717280694"/>
+                  </a:ext>
+                </a:extLst>
+              </a:tr>
+              <a:tr h="997246">
+                <a:tc>
+                  <a:txBody>
+                    <a:bodyPr/>
+                    <a:lstStyle/>
+                    <a:p>
+                      <a:pPr algn="ctr" fontAlgn="ctr">
+                        <a:buNone/>
+                      </a:pPr>
+                      <a:r>
+                        <a:rPr lang="en-US" sz="900" b="1" i="0" u="none" strike="noStrike">
+                          <a:solidFill>
+                            <a:srgbClr val="000000"/>
+                          </a:solidFill>
+                          <a:effectLst/>
+                          <a:latin typeface="等线" panose="02010600030101010101" pitchFamily="2" charset="-122"/>
+                          <a:ea typeface="等线" panose="02010600030101010101" pitchFamily="2" charset="-122"/>
+                        </a:rPr>
+                        <a:t>Dual-masked contrastive learning based hypergraph foundation model for </a:t>
+                      </a:r>
+                      <a:br>
+                        <a:rPr lang="en-US" sz="900" b="1" i="0" u="none" strike="noStrike">
+                          <a:solidFill>
+                            <a:srgbClr val="000000"/>
+                          </a:solidFill>
+                          <a:effectLst/>
+                          <a:latin typeface="等线" panose="02010600030101010101" pitchFamily="2" charset="-122"/>
+                          <a:ea typeface="等线" panose="02010600030101010101" pitchFamily="2" charset="-122"/>
+                        </a:rPr>
+                      </a:br>
+                      <a:r>
+                        <a:rPr lang="en-US" sz="900" b="1" i="0" u="none" strike="noStrike">
+                          <a:solidFill>
+                            <a:srgbClr val="000000"/>
+                          </a:solidFill>
+                          <a:effectLst/>
+                          <a:latin typeface="等线" panose="02010600030101010101" pitchFamily="2" charset="-122"/>
+                          <a:ea typeface="等线" panose="02010600030101010101" pitchFamily="2" charset="-122"/>
+                        </a:rPr>
+                        <a:t>whole slide images</a:t>
+                      </a:r>
+                    </a:p>
+                  </a:txBody>
+                  <a:tcPr marL="3097" marR="3097" marT="3097" marB="0" anchor="ctr">
+                    <a:lnL w="12700" cap="flat" cmpd="sng" algn="ctr">
+                      <a:solidFill>
+                        <a:schemeClr val="tx1"/>
+                      </a:solidFill>
+                      <a:prstDash val="solid"/>
+                      <a:round/>
+                      <a:headEnd type="none" w="med" len="med"/>
+                      <a:tailEnd type="none" w="med" len="med"/>
+                    </a:lnL>
+                    <a:lnR w="12700" cap="flat" cmpd="sng" algn="ctr">
+                      <a:solidFill>
+                        <a:schemeClr val="tx1"/>
+                      </a:solidFill>
+                      <a:prstDash val="solid"/>
+                      <a:round/>
+                      <a:headEnd type="none" w="med" len="med"/>
+                      <a:tailEnd type="none" w="med" len="med"/>
+                    </a:lnR>
+                    <a:lnT w="12700" cap="flat" cmpd="sng" algn="ctr">
+                      <a:solidFill>
+                        <a:schemeClr val="tx1"/>
+                      </a:solidFill>
+                      <a:prstDash val="solid"/>
+                      <a:round/>
+                      <a:headEnd type="none" w="med" len="med"/>
+                      <a:tailEnd type="none" w="med" len="med"/>
+                    </a:lnT>
+                    <a:lnB w="12700" cap="flat" cmpd="sng" algn="ctr">
+                      <a:solidFill>
+                        <a:schemeClr val="tx1"/>
+                      </a:solidFill>
+                      <a:prstDash val="solid"/>
+                      <a:round/>
+                      <a:headEnd type="none" w="med" len="med"/>
+                      <a:tailEnd type="none" w="med" len="med"/>
+                    </a:lnB>
+                    <a:noFill/>
+                  </a:tcPr>
+                </a:tc>
+                <a:tc>
+                  <a:txBody>
+                    <a:bodyPr/>
+                    <a:lstStyle/>
+                    <a:p>
+                      <a:pPr algn="ctr" fontAlgn="ctr">
+                        <a:buNone/>
+                      </a:pPr>
+                      <a:r>
+                        <a:rPr lang="en-US" altLang="zh-CN" sz="900" b="1" i="0" u="none" strike="noStrike" dirty="0">
+                          <a:solidFill>
+                            <a:srgbClr val="000000"/>
+                          </a:solidFill>
+                          <a:effectLst/>
+                          <a:latin typeface="等线" panose="02010600030101010101" pitchFamily="2" charset="-122"/>
+                          <a:ea typeface="等线" panose="02010600030101010101" pitchFamily="2" charset="-122"/>
+                        </a:rPr>
+                        <a:t>2025</a:t>
+                      </a:r>
+                    </a:p>
+                  </a:txBody>
+                  <a:tcPr marL="3097" marR="3097" marT="3097" marB="0" anchor="ctr">
+                    <a:lnL w="12700" cap="flat" cmpd="sng" algn="ctr">
+                      <a:solidFill>
+                        <a:schemeClr val="tx1"/>
+                      </a:solidFill>
+                      <a:prstDash val="solid"/>
+                      <a:round/>
+                      <a:headEnd type="none" w="med" len="med"/>
+                      <a:tailEnd type="none" w="med" len="med"/>
+                    </a:lnL>
+                    <a:lnR w="12700" cap="flat" cmpd="sng" algn="ctr">
+                      <a:solidFill>
+                        <a:schemeClr val="tx1"/>
+                      </a:solidFill>
+                      <a:prstDash val="solid"/>
+                      <a:round/>
+                      <a:headEnd type="none" w="med" len="med"/>
+                      <a:tailEnd type="none" w="med" len="med"/>
+                    </a:lnR>
+                    <a:lnT w="12700" cap="flat" cmpd="sng" algn="ctr">
+                      <a:solidFill>
+                        <a:schemeClr val="tx1"/>
+                      </a:solidFill>
+                      <a:prstDash val="solid"/>
+                      <a:round/>
+                      <a:headEnd type="none" w="med" len="med"/>
+                      <a:tailEnd type="none" w="med" len="med"/>
+                    </a:lnT>
+                    <a:lnB w="12700" cap="flat" cmpd="sng" algn="ctr">
+                      <a:solidFill>
+                        <a:schemeClr val="tx1"/>
+                      </a:solidFill>
+                      <a:prstDash val="solid"/>
+                      <a:round/>
+                      <a:headEnd type="none" w="med" len="med"/>
+                      <a:tailEnd type="none" w="med" len="med"/>
+                    </a:lnB>
+                    <a:noFill/>
+                  </a:tcPr>
+                </a:tc>
+                <a:tc>
+                  <a:txBody>
+                    <a:bodyPr/>
+                    <a:lstStyle/>
+                    <a:p>
+                      <a:pPr algn="ctr" fontAlgn="ctr">
+                        <a:buNone/>
+                      </a:pPr>
+                      <a:r>
+                        <a:rPr lang="en-US" sz="900" b="1" i="0" u="none" strike="noStrike">
+                          <a:solidFill>
+                            <a:srgbClr val="000000"/>
+                          </a:solidFill>
+                          <a:effectLst/>
+                          <a:latin typeface="等线" panose="02010600030101010101" pitchFamily="2" charset="-122"/>
+                          <a:ea typeface="等线" panose="02010600030101010101" pitchFamily="2" charset="-122"/>
+                        </a:rPr>
+                        <a:t>Pattern Recognition</a:t>
+                      </a:r>
+                    </a:p>
+                  </a:txBody>
+                  <a:tcPr marL="3097" marR="3097" marT="3097" marB="0" anchor="ctr">
+                    <a:lnL w="12700" cap="flat" cmpd="sng" algn="ctr">
+                      <a:solidFill>
+                        <a:schemeClr val="tx1"/>
+                      </a:solidFill>
+                      <a:prstDash val="solid"/>
+                      <a:round/>
+                      <a:headEnd type="none" w="med" len="med"/>
+                      <a:tailEnd type="none" w="med" len="med"/>
+                    </a:lnL>
+                    <a:lnR w="12700" cap="flat" cmpd="sng" algn="ctr">
+                      <a:solidFill>
+                        <a:schemeClr val="tx1"/>
+                      </a:solidFill>
+                      <a:prstDash val="solid"/>
+                      <a:round/>
+                      <a:headEnd type="none" w="med" len="med"/>
+                      <a:tailEnd type="none" w="med" len="med"/>
+                    </a:lnR>
+                    <a:lnT w="12700" cap="flat" cmpd="sng" algn="ctr">
+                      <a:solidFill>
+                        <a:schemeClr val="tx1"/>
+                      </a:solidFill>
+                      <a:prstDash val="solid"/>
+                      <a:round/>
+                      <a:headEnd type="none" w="med" len="med"/>
+                      <a:tailEnd type="none" w="med" len="med"/>
+                    </a:lnT>
+                    <a:lnB w="12700" cap="flat" cmpd="sng" algn="ctr">
+                      <a:solidFill>
+                        <a:schemeClr val="tx1"/>
+                      </a:solidFill>
+                      <a:prstDash val="solid"/>
+                      <a:round/>
+                      <a:headEnd type="none" w="med" len="med"/>
+                      <a:tailEnd type="none" w="med" len="med"/>
+                    </a:lnB>
+                    <a:noFill/>
+                  </a:tcPr>
+                </a:tc>
+                <a:tc>
+                  <a:txBody>
+                    <a:bodyPr/>
+                    <a:lstStyle/>
+                    <a:p>
+                      <a:pPr algn="ctr" fontAlgn="ctr">
+                        <a:buNone/>
+                      </a:pPr>
+                      <a:r>
+                        <a:rPr lang="en-US" altLang="zh-CN" sz="900" b="1" i="0" u="none" strike="noStrike" dirty="0">
+                          <a:solidFill>
+                            <a:srgbClr val="000000"/>
+                          </a:solidFill>
+                          <a:effectLst/>
+                          <a:latin typeface="等线" panose="02010600030101010101" pitchFamily="2" charset="-122"/>
+                          <a:ea typeface="等线" panose="02010600030101010101" pitchFamily="2" charset="-122"/>
+                        </a:rPr>
+                        <a:t>15.8</a:t>
+                      </a:r>
+                    </a:p>
+                  </a:txBody>
+                  <a:tcPr marL="3097" marR="3097" marT="3097" marB="0" anchor="ctr">
+                    <a:lnL w="12700" cap="flat" cmpd="sng" algn="ctr">
+                      <a:solidFill>
+                        <a:schemeClr val="tx1"/>
+                      </a:solidFill>
+                      <a:prstDash val="solid"/>
+                      <a:round/>
+                      <a:headEnd type="none" w="med" len="med"/>
+                      <a:tailEnd type="none" w="med" len="med"/>
+                    </a:lnL>
+                    <a:lnR w="12700" cap="flat" cmpd="sng" algn="ctr">
+                      <a:solidFill>
+                        <a:schemeClr val="tx1"/>
+                      </a:solidFill>
+                      <a:prstDash val="solid"/>
+                      <a:round/>
+                      <a:headEnd type="none" w="med" len="med"/>
+                      <a:tailEnd type="none" w="med" len="med"/>
+                    </a:lnR>
+                    <a:lnT w="12700" cap="flat" cmpd="sng" algn="ctr">
+                      <a:solidFill>
+                        <a:schemeClr val="tx1"/>
+                      </a:solidFill>
+                      <a:prstDash val="solid"/>
+                      <a:round/>
+                      <a:headEnd type="none" w="med" len="med"/>
+                      <a:tailEnd type="none" w="med" len="med"/>
+                    </a:lnT>
+                    <a:lnB w="12700" cap="flat" cmpd="sng" algn="ctr">
+                      <a:solidFill>
+                        <a:schemeClr val="tx1"/>
+                      </a:solidFill>
+                      <a:prstDash val="solid"/>
+                      <a:round/>
+                      <a:headEnd type="none" w="med" len="med"/>
+                      <a:tailEnd type="none" w="med" len="med"/>
+                    </a:lnB>
+                    <a:noFill/>
+                  </a:tcPr>
+                </a:tc>
+                <a:tc>
+                  <a:txBody>
+                    <a:bodyPr/>
+                    <a:lstStyle/>
+                    <a:p>
+                      <a:pPr algn="ctr" fontAlgn="ctr">
+                        <a:buNone/>
+                      </a:pPr>
+                      <a:r>
+                        <a:rPr lang="zh-CN" altLang="en-US" sz="900" b="1" i="0" u="none" strike="noStrike">
+                          <a:solidFill>
+                            <a:srgbClr val="000000"/>
+                          </a:solidFill>
+                          <a:effectLst/>
+                          <a:latin typeface="等线" panose="02010600030101010101" pitchFamily="2" charset="-122"/>
+                          <a:ea typeface="等线" panose="02010600030101010101" pitchFamily="2" charset="-122"/>
+                        </a:rPr>
+                        <a:t>病理组织图像</a:t>
+                      </a:r>
+                    </a:p>
+                  </a:txBody>
+                  <a:tcPr marL="3097" marR="3097" marT="3097" marB="0" anchor="ctr">
+                    <a:lnL w="12700" cap="flat" cmpd="sng" algn="ctr">
+                      <a:solidFill>
+                        <a:schemeClr val="tx1"/>
+                      </a:solidFill>
+                      <a:prstDash val="solid"/>
+                      <a:round/>
+                      <a:headEnd type="none" w="med" len="med"/>
+                      <a:tailEnd type="none" w="med" len="med"/>
+                    </a:lnL>
+                    <a:lnR w="12700" cap="flat" cmpd="sng" algn="ctr">
+                      <a:solidFill>
+                        <a:schemeClr val="tx1"/>
+                      </a:solidFill>
+                      <a:prstDash val="solid"/>
+                      <a:round/>
+                      <a:headEnd type="none" w="med" len="med"/>
+                      <a:tailEnd type="none" w="med" len="med"/>
+                    </a:lnR>
+                    <a:lnT w="12700" cap="flat" cmpd="sng" algn="ctr">
+                      <a:solidFill>
+                        <a:schemeClr val="tx1"/>
+                      </a:solidFill>
+                      <a:prstDash val="solid"/>
+                      <a:round/>
+                      <a:headEnd type="none" w="med" len="med"/>
+                      <a:tailEnd type="none" w="med" len="med"/>
+                    </a:lnT>
+                    <a:lnB w="12700" cap="flat" cmpd="sng" algn="ctr">
+                      <a:solidFill>
+                        <a:schemeClr val="tx1"/>
+                      </a:solidFill>
+                      <a:prstDash val="solid"/>
+                      <a:round/>
+                      <a:headEnd type="none" w="med" len="med"/>
+                      <a:tailEnd type="none" w="med" len="med"/>
+                    </a:lnB>
+                    <a:noFill/>
+                  </a:tcPr>
+                </a:tc>
+                <a:tc>
+                  <a:txBody>
+                    <a:bodyPr/>
+                    <a:lstStyle/>
+                    <a:p>
+                      <a:pPr algn="ctr" fontAlgn="ctr">
+                        <a:buNone/>
+                      </a:pPr>
+                      <a:r>
+                        <a:rPr lang="en-US" altLang="zh-CN" sz="900" b="1" i="0" u="none" strike="noStrike" dirty="0">
+                          <a:solidFill>
+                            <a:srgbClr val="000000"/>
+                          </a:solidFill>
+                          <a:effectLst/>
+                          <a:latin typeface="等线" panose="02010600030101010101" pitchFamily="2" charset="-122"/>
+                          <a:ea typeface="等线" panose="02010600030101010101" pitchFamily="2" charset="-122"/>
+                        </a:rPr>
+                        <a:t>3000</a:t>
+                      </a:r>
+                    </a:p>
+                  </a:txBody>
+                  <a:tcPr marL="3097" marR="3097" marT="3097" marB="0" anchor="ctr">
+                    <a:lnL w="12700" cap="flat" cmpd="sng" algn="ctr">
+                      <a:solidFill>
+                        <a:schemeClr val="tx1"/>
+                      </a:solidFill>
+                      <a:prstDash val="solid"/>
+                      <a:round/>
+                      <a:headEnd type="none" w="med" len="med"/>
+                      <a:tailEnd type="none" w="med" len="med"/>
+                    </a:lnL>
+                    <a:lnR w="12700" cap="flat" cmpd="sng" algn="ctr">
+                      <a:solidFill>
+                        <a:schemeClr val="tx1"/>
+                      </a:solidFill>
+                      <a:prstDash val="solid"/>
+                      <a:round/>
+                      <a:headEnd type="none" w="med" len="med"/>
+                      <a:tailEnd type="none" w="med" len="med"/>
+                    </a:lnR>
+                    <a:lnT w="12700" cap="flat" cmpd="sng" algn="ctr">
+                      <a:solidFill>
+                        <a:schemeClr val="tx1"/>
+                      </a:solidFill>
+                      <a:prstDash val="solid"/>
+                      <a:round/>
+                      <a:headEnd type="none" w="med" len="med"/>
+                      <a:tailEnd type="none" w="med" len="med"/>
+                    </a:lnT>
+                    <a:lnB w="12700" cap="flat" cmpd="sng" algn="ctr">
+                      <a:solidFill>
+                        <a:schemeClr val="tx1"/>
+                      </a:solidFill>
+                      <a:prstDash val="solid"/>
+                      <a:round/>
+                      <a:headEnd type="none" w="med" len="med"/>
+                      <a:tailEnd type="none" w="med" len="med"/>
+                    </a:lnB>
+                    <a:noFill/>
+                  </a:tcPr>
+                </a:tc>
+                <a:tc>
+                  <a:txBody>
+                    <a:bodyPr/>
+                    <a:lstStyle/>
+                    <a:p>
+                      <a:pPr algn="ctr" fontAlgn="ctr">
+                        <a:buNone/>
+                      </a:pPr>
+                      <a:r>
+                        <a:rPr lang="zh-CN" altLang="en-US" sz="900" b="1" i="0" u="none" strike="noStrike">
+                          <a:solidFill>
+                            <a:srgbClr val="000000"/>
+                          </a:solidFill>
+                          <a:effectLst/>
+                          <a:latin typeface="等线" panose="02010600030101010101" pitchFamily="2" charset="-122"/>
+                          <a:ea typeface="等线" panose="02010600030101010101" pitchFamily="2" charset="-122"/>
+                        </a:rPr>
+                        <a:t>对比学习</a:t>
+                      </a:r>
+                    </a:p>
+                  </a:txBody>
+                  <a:tcPr marL="3097" marR="3097" marT="3097" marB="0" anchor="ctr">
+                    <a:lnL w="12700" cap="flat" cmpd="sng" algn="ctr">
+                      <a:solidFill>
+                        <a:schemeClr val="tx1"/>
+                      </a:solidFill>
+                      <a:prstDash val="solid"/>
+                      <a:round/>
+                      <a:headEnd type="none" w="med" len="med"/>
+                      <a:tailEnd type="none" w="med" len="med"/>
+                    </a:lnL>
+                    <a:lnR w="12700" cap="flat" cmpd="sng" algn="ctr">
+                      <a:solidFill>
+                        <a:schemeClr val="tx1"/>
+                      </a:solidFill>
+                      <a:prstDash val="solid"/>
+                      <a:round/>
+                      <a:headEnd type="none" w="med" len="med"/>
+                      <a:tailEnd type="none" w="med" len="med"/>
+                    </a:lnR>
+                    <a:lnT w="12700" cap="flat" cmpd="sng" algn="ctr">
+                      <a:solidFill>
+                        <a:schemeClr val="tx1"/>
+                      </a:solidFill>
+                      <a:prstDash val="solid"/>
+                      <a:round/>
+                      <a:headEnd type="none" w="med" len="med"/>
+                      <a:tailEnd type="none" w="med" len="med"/>
+                    </a:lnT>
+                    <a:lnB w="12700" cap="flat" cmpd="sng" algn="ctr">
+                      <a:solidFill>
+                        <a:schemeClr val="tx1"/>
+                      </a:solidFill>
+                      <a:prstDash val="solid"/>
+                      <a:round/>
+                      <a:headEnd type="none" w="med" len="med"/>
+                      <a:tailEnd type="none" w="med" len="med"/>
+                    </a:lnB>
+                    <a:noFill/>
+                  </a:tcPr>
+                </a:tc>
+                <a:extLst>
+                  <a:ext uri="{0D108BD9-81ED-4DB2-BD59-A6C34878D82A}">
+                    <a16:rowId xmlns:a16="http://schemas.microsoft.com/office/drawing/2014/main" val="3644989211"/>
+                  </a:ext>
+                </a:extLst>
+              </a:tr>
+              <a:tr h="684445">
+                <a:tc>
+                  <a:txBody>
+                    <a:bodyPr/>
+                    <a:lstStyle/>
+                    <a:p>
+                      <a:pPr algn="ctr" fontAlgn="ctr">
+                        <a:buNone/>
+                      </a:pPr>
+                      <a:r>
+                        <a:rPr lang="en-US" sz="900" b="1" i="0" u="none" strike="noStrike">
+                          <a:solidFill>
+                            <a:srgbClr val="000000"/>
+                          </a:solidFill>
+                          <a:effectLst/>
+                          <a:latin typeface="等线" panose="02010600030101010101" pitchFamily="2" charset="-122"/>
+                          <a:ea typeface="等线" panose="02010600030101010101" pitchFamily="2" charset="-122"/>
+                        </a:rPr>
+                        <a:t>A vision–language foundation model for precision oncology</a:t>
+                      </a:r>
+                    </a:p>
+                  </a:txBody>
+                  <a:tcPr marL="3097" marR="3097" marT="3097" marB="0" anchor="ctr">
+                    <a:lnL w="12700" cap="flat" cmpd="sng" algn="ctr">
+                      <a:solidFill>
+                        <a:schemeClr val="tx1"/>
+                      </a:solidFill>
+                      <a:prstDash val="solid"/>
+                      <a:round/>
+                      <a:headEnd type="none" w="med" len="med"/>
+                      <a:tailEnd type="none" w="med" len="med"/>
+                    </a:lnL>
+                    <a:lnR w="12700" cap="flat" cmpd="sng" algn="ctr">
+                      <a:solidFill>
+                        <a:schemeClr val="tx1"/>
+                      </a:solidFill>
+                      <a:prstDash val="solid"/>
+                      <a:round/>
+                      <a:headEnd type="none" w="med" len="med"/>
+                      <a:tailEnd type="none" w="med" len="med"/>
+                    </a:lnR>
+                    <a:lnT w="12700" cap="flat" cmpd="sng" algn="ctr">
+                      <a:solidFill>
+                        <a:schemeClr val="tx1"/>
+                      </a:solidFill>
+                      <a:prstDash val="solid"/>
+                      <a:round/>
+                      <a:headEnd type="none" w="med" len="med"/>
+                      <a:tailEnd type="none" w="med" len="med"/>
+                    </a:lnT>
+                    <a:lnB w="12700" cap="flat" cmpd="sng" algn="ctr">
+                      <a:solidFill>
+                        <a:schemeClr val="tx1"/>
+                      </a:solidFill>
+                      <a:prstDash val="solid"/>
+                      <a:round/>
+                      <a:headEnd type="none" w="med" len="med"/>
+                      <a:tailEnd type="none" w="med" len="med"/>
+                    </a:lnB>
+                    <a:noFill/>
+                  </a:tcPr>
+                </a:tc>
+                <a:tc>
+                  <a:txBody>
+                    <a:bodyPr/>
+                    <a:lstStyle/>
+                    <a:p>
+                      <a:pPr algn="ctr" fontAlgn="ctr">
+                        <a:buNone/>
+                      </a:pPr>
+                      <a:r>
+                        <a:rPr lang="en-US" altLang="zh-CN" sz="900" b="1" i="0" u="none" strike="noStrike" dirty="0">
+                          <a:solidFill>
+                            <a:srgbClr val="000000"/>
+                          </a:solidFill>
+                          <a:effectLst/>
+                          <a:latin typeface="等线" panose="02010600030101010101" pitchFamily="2" charset="-122"/>
+                          <a:ea typeface="等线" panose="02010600030101010101" pitchFamily="2" charset="-122"/>
+                        </a:rPr>
+                        <a:t>2025</a:t>
+                      </a:r>
+                    </a:p>
+                  </a:txBody>
+                  <a:tcPr marL="3097" marR="3097" marT="3097" marB="0" anchor="ctr">
+                    <a:lnL w="12700" cap="flat" cmpd="sng" algn="ctr">
+                      <a:solidFill>
+                        <a:schemeClr val="tx1"/>
+                      </a:solidFill>
+                      <a:prstDash val="solid"/>
+                      <a:round/>
+                      <a:headEnd type="none" w="med" len="med"/>
+                      <a:tailEnd type="none" w="med" len="med"/>
+                    </a:lnL>
+                    <a:lnR w="12700" cap="flat" cmpd="sng" algn="ctr">
+                      <a:solidFill>
+                        <a:schemeClr val="tx1"/>
+                      </a:solidFill>
+                      <a:prstDash val="solid"/>
+                      <a:round/>
+                      <a:headEnd type="none" w="med" len="med"/>
+                      <a:tailEnd type="none" w="med" len="med"/>
+                    </a:lnR>
+                    <a:lnT w="12700" cap="flat" cmpd="sng" algn="ctr">
+                      <a:solidFill>
+                        <a:schemeClr val="tx1"/>
+                      </a:solidFill>
+                      <a:prstDash val="solid"/>
+                      <a:round/>
+                      <a:headEnd type="none" w="med" len="med"/>
+                      <a:tailEnd type="none" w="med" len="med"/>
+                    </a:lnT>
+                    <a:lnB w="12700" cap="flat" cmpd="sng" algn="ctr">
+                      <a:solidFill>
+                        <a:schemeClr val="tx1"/>
+                      </a:solidFill>
+                      <a:prstDash val="solid"/>
+                      <a:round/>
+                      <a:headEnd type="none" w="med" len="med"/>
+                      <a:tailEnd type="none" w="med" len="med"/>
+                    </a:lnB>
+                    <a:noFill/>
+                  </a:tcPr>
+                </a:tc>
+                <a:tc>
+                  <a:txBody>
+                    <a:bodyPr/>
+                    <a:lstStyle/>
+                    <a:p>
+                      <a:pPr algn="ctr" fontAlgn="ctr">
+                        <a:buNone/>
+                      </a:pPr>
+                      <a:r>
+                        <a:rPr lang="en-US" altLang="zh-CN" sz="900" b="1" i="0" u="none" strike="noStrike">
+                          <a:solidFill>
+                            <a:srgbClr val="000000"/>
+                          </a:solidFill>
+                          <a:effectLst/>
+                          <a:latin typeface="等线" panose="02010600030101010101" pitchFamily="2" charset="-122"/>
+                          <a:ea typeface="等线" panose="02010600030101010101" pitchFamily="2" charset="-122"/>
+                        </a:rPr>
+                        <a:t>N</a:t>
+                      </a:r>
+                      <a:r>
+                        <a:rPr lang="en-US" sz="900" b="1" i="0" u="none" strike="noStrike">
+                          <a:solidFill>
+                            <a:srgbClr val="000000"/>
+                          </a:solidFill>
+                          <a:effectLst/>
+                          <a:latin typeface="等线" panose="02010600030101010101" pitchFamily="2" charset="-122"/>
+                          <a:ea typeface="等线" panose="02010600030101010101" pitchFamily="2" charset="-122"/>
+                        </a:rPr>
+                        <a:t>ature</a:t>
+                      </a:r>
+                      <a:endParaRPr lang="en-US" sz="900" b="1" i="0" u="none" strike="noStrike" dirty="0">
+                        <a:solidFill>
+                          <a:srgbClr val="000000"/>
+                        </a:solidFill>
+                        <a:effectLst/>
+                        <a:latin typeface="等线" panose="02010600030101010101" pitchFamily="2" charset="-122"/>
+                        <a:ea typeface="等线" panose="02010600030101010101" pitchFamily="2" charset="-122"/>
+                      </a:endParaRPr>
+                    </a:p>
+                  </a:txBody>
+                  <a:tcPr marL="3097" marR="3097" marT="3097" marB="0" anchor="ctr">
+                    <a:lnL w="12700" cap="flat" cmpd="sng" algn="ctr">
+                      <a:solidFill>
+                        <a:schemeClr val="tx1"/>
+                      </a:solidFill>
+                      <a:prstDash val="solid"/>
+                      <a:round/>
+                      <a:headEnd type="none" w="med" len="med"/>
+                      <a:tailEnd type="none" w="med" len="med"/>
+                    </a:lnL>
+                    <a:lnR w="12700" cap="flat" cmpd="sng" algn="ctr">
+                      <a:solidFill>
+                        <a:schemeClr val="tx1"/>
+                      </a:solidFill>
+                      <a:prstDash val="solid"/>
+                      <a:round/>
+                      <a:headEnd type="none" w="med" len="med"/>
+                      <a:tailEnd type="none" w="med" len="med"/>
+                    </a:lnR>
+                    <a:lnT w="12700" cap="flat" cmpd="sng" algn="ctr">
+                      <a:solidFill>
+                        <a:schemeClr val="tx1"/>
+                      </a:solidFill>
+                      <a:prstDash val="solid"/>
+                      <a:round/>
+                      <a:headEnd type="none" w="med" len="med"/>
+                      <a:tailEnd type="none" w="med" len="med"/>
+                    </a:lnT>
+                    <a:lnB w="12700" cap="flat" cmpd="sng" algn="ctr">
+                      <a:solidFill>
+                        <a:schemeClr val="tx1"/>
+                      </a:solidFill>
+                      <a:prstDash val="solid"/>
+                      <a:round/>
+                      <a:headEnd type="none" w="med" len="med"/>
+                      <a:tailEnd type="none" w="med" len="med"/>
+                    </a:lnB>
+                    <a:noFill/>
+                  </a:tcPr>
+                </a:tc>
+                <a:tc>
+                  <a:txBody>
+                    <a:bodyPr/>
+                    <a:lstStyle/>
+                    <a:p>
+                      <a:pPr algn="ctr" fontAlgn="ctr">
+                        <a:buNone/>
+                      </a:pPr>
+                      <a:r>
+                        <a:rPr lang="en-US" altLang="zh-CN" sz="900" b="1" i="0" u="none" strike="noStrike" dirty="0">
+                          <a:solidFill>
+                            <a:srgbClr val="000000"/>
+                          </a:solidFill>
+                          <a:effectLst/>
+                          <a:latin typeface="等线" panose="02010600030101010101" pitchFamily="2" charset="-122"/>
+                          <a:ea typeface="等线" panose="02010600030101010101" pitchFamily="2" charset="-122"/>
+                        </a:rPr>
+                        <a:t>48.5</a:t>
+                      </a:r>
+                    </a:p>
+                  </a:txBody>
+                  <a:tcPr marL="3097" marR="3097" marT="3097" marB="0" anchor="ctr">
+                    <a:lnL w="12700" cap="flat" cmpd="sng" algn="ctr">
+                      <a:solidFill>
+                        <a:schemeClr val="tx1"/>
+                      </a:solidFill>
+                      <a:prstDash val="solid"/>
+                      <a:round/>
+                      <a:headEnd type="none" w="med" len="med"/>
+                      <a:tailEnd type="none" w="med" len="med"/>
+                    </a:lnL>
+                    <a:lnR w="12700" cap="flat" cmpd="sng" algn="ctr">
+                      <a:solidFill>
+                        <a:schemeClr val="tx1"/>
+                      </a:solidFill>
+                      <a:prstDash val="solid"/>
+                      <a:round/>
+                      <a:headEnd type="none" w="med" len="med"/>
+                      <a:tailEnd type="none" w="med" len="med"/>
+                    </a:lnR>
+                    <a:lnT w="12700" cap="flat" cmpd="sng" algn="ctr">
+                      <a:solidFill>
+                        <a:schemeClr val="tx1"/>
+                      </a:solidFill>
+                      <a:prstDash val="solid"/>
+                      <a:round/>
+                      <a:headEnd type="none" w="med" len="med"/>
+                      <a:tailEnd type="none" w="med" len="med"/>
+                    </a:lnT>
+                    <a:lnB w="12700" cap="flat" cmpd="sng" algn="ctr">
+                      <a:solidFill>
+                        <a:schemeClr val="tx1"/>
+                      </a:solidFill>
+                      <a:prstDash val="solid"/>
+                      <a:round/>
+                      <a:headEnd type="none" w="med" len="med"/>
+                      <a:tailEnd type="none" w="med" len="med"/>
+                    </a:lnB>
+                    <a:noFill/>
+                  </a:tcPr>
+                </a:tc>
+                <a:tc>
+                  <a:txBody>
+                    <a:bodyPr/>
+                    <a:lstStyle/>
+                    <a:p>
+                      <a:pPr algn="ctr" fontAlgn="ctr">
+                        <a:buNone/>
+                      </a:pPr>
+                      <a:r>
+                        <a:rPr lang="zh-CN" altLang="en-US" sz="900" b="1" i="0" u="none" strike="noStrike">
+                          <a:solidFill>
+                            <a:srgbClr val="000000"/>
+                          </a:solidFill>
+                          <a:effectLst/>
+                          <a:latin typeface="等线" panose="02010600030101010101" pitchFamily="2" charset="-122"/>
+                          <a:ea typeface="等线" panose="02010600030101010101" pitchFamily="2" charset="-122"/>
+                        </a:rPr>
+                        <a:t>病理组织图像和文本</a:t>
+                      </a:r>
+                    </a:p>
+                  </a:txBody>
+                  <a:tcPr marL="3097" marR="3097" marT="3097" marB="0" anchor="ctr">
+                    <a:lnL w="12700" cap="flat" cmpd="sng" algn="ctr">
+                      <a:solidFill>
+                        <a:schemeClr val="tx1"/>
+                      </a:solidFill>
+                      <a:prstDash val="solid"/>
+                      <a:round/>
+                      <a:headEnd type="none" w="med" len="med"/>
+                      <a:tailEnd type="none" w="med" len="med"/>
+                    </a:lnL>
+                    <a:lnR w="12700" cap="flat" cmpd="sng" algn="ctr">
+                      <a:solidFill>
+                        <a:schemeClr val="tx1"/>
+                      </a:solidFill>
+                      <a:prstDash val="solid"/>
+                      <a:round/>
+                      <a:headEnd type="none" w="med" len="med"/>
+                      <a:tailEnd type="none" w="med" len="med"/>
+                    </a:lnR>
+                    <a:lnT w="12700" cap="flat" cmpd="sng" algn="ctr">
+                      <a:solidFill>
+                        <a:schemeClr val="tx1"/>
+                      </a:solidFill>
+                      <a:prstDash val="solid"/>
+                      <a:round/>
+                      <a:headEnd type="none" w="med" len="med"/>
+                      <a:tailEnd type="none" w="med" len="med"/>
+                    </a:lnT>
+                    <a:lnB w="12700" cap="flat" cmpd="sng" algn="ctr">
+                      <a:solidFill>
+                        <a:schemeClr val="tx1"/>
+                      </a:solidFill>
+                      <a:prstDash val="solid"/>
+                      <a:round/>
+                      <a:headEnd type="none" w="med" len="med"/>
+                      <a:tailEnd type="none" w="med" len="med"/>
+                    </a:lnB>
+                    <a:noFill/>
+                  </a:tcPr>
+                </a:tc>
+                <a:tc>
+                  <a:txBody>
+                    <a:bodyPr/>
+                    <a:lstStyle/>
+                    <a:p>
+                      <a:pPr algn="ctr" fontAlgn="ctr">
+                        <a:buNone/>
+                      </a:pPr>
+                      <a:r>
+                        <a:rPr lang="en-US" altLang="zh-CN" sz="900" b="1" i="0" u="none" strike="noStrike" dirty="0">
+                          <a:solidFill>
+                            <a:srgbClr val="000000"/>
+                          </a:solidFill>
+                          <a:effectLst/>
+                          <a:latin typeface="等线" panose="02010600030101010101" pitchFamily="2" charset="-122"/>
+                          <a:ea typeface="等线" panose="02010600030101010101" pitchFamily="2" charset="-122"/>
+                        </a:rPr>
+                        <a:t>5000 </a:t>
+                      </a:r>
+                      <a:r>
+                        <a:rPr lang="zh-CN" altLang="en-US" sz="900" b="1" i="0" u="none" strike="noStrike" dirty="0">
+                          <a:solidFill>
+                            <a:srgbClr val="000000"/>
+                          </a:solidFill>
+                          <a:effectLst/>
+                          <a:latin typeface="等线" panose="02010600030101010101" pitchFamily="2" charset="-122"/>
+                          <a:ea typeface="等线" panose="02010600030101010101" pitchFamily="2" charset="-122"/>
+                        </a:rPr>
+                        <a:t>万病理图像和 </a:t>
+                      </a:r>
+                      <a:r>
+                        <a:rPr lang="en-US" altLang="zh-CN" sz="900" b="1" i="0" u="none" strike="noStrike" dirty="0">
+                          <a:solidFill>
+                            <a:srgbClr val="000000"/>
+                          </a:solidFill>
+                          <a:effectLst/>
+                          <a:latin typeface="等线" panose="02010600030101010101" pitchFamily="2" charset="-122"/>
+                          <a:ea typeface="等线" panose="02010600030101010101" pitchFamily="2" charset="-122"/>
+                        </a:rPr>
+                        <a:t>10 </a:t>
+                      </a:r>
+                      <a:r>
+                        <a:rPr lang="zh-CN" altLang="en-US" sz="900" b="1" i="0" u="none" strike="noStrike" dirty="0">
+                          <a:solidFill>
+                            <a:srgbClr val="000000"/>
+                          </a:solidFill>
+                          <a:effectLst/>
+                          <a:latin typeface="等线" panose="02010600030101010101" pitchFamily="2" charset="-122"/>
+                          <a:ea typeface="等线" panose="02010600030101010101" pitchFamily="2" charset="-122"/>
+                        </a:rPr>
+                        <a:t>亿病理相关文本</a:t>
+                      </a:r>
+                    </a:p>
+                  </a:txBody>
+                  <a:tcPr marL="3097" marR="3097" marT="3097" marB="0" anchor="ctr">
+                    <a:lnL w="12700" cap="flat" cmpd="sng" algn="ctr">
+                      <a:solidFill>
+                        <a:schemeClr val="tx1"/>
+                      </a:solidFill>
+                      <a:prstDash val="solid"/>
+                      <a:round/>
+                      <a:headEnd type="none" w="med" len="med"/>
+                      <a:tailEnd type="none" w="med" len="med"/>
+                    </a:lnL>
+                    <a:lnR w="12700" cap="flat" cmpd="sng" algn="ctr">
+                      <a:solidFill>
+                        <a:schemeClr val="tx1"/>
+                      </a:solidFill>
+                      <a:prstDash val="solid"/>
+                      <a:round/>
+                      <a:headEnd type="none" w="med" len="med"/>
+                      <a:tailEnd type="none" w="med" len="med"/>
+                    </a:lnR>
+                    <a:lnT w="12700" cap="flat" cmpd="sng" algn="ctr">
+                      <a:solidFill>
+                        <a:schemeClr val="tx1"/>
+                      </a:solidFill>
+                      <a:prstDash val="solid"/>
+                      <a:round/>
+                      <a:headEnd type="none" w="med" len="med"/>
+                      <a:tailEnd type="none" w="med" len="med"/>
+                    </a:lnT>
+                    <a:lnB w="12700" cap="flat" cmpd="sng" algn="ctr">
+                      <a:solidFill>
+                        <a:schemeClr val="tx1"/>
+                      </a:solidFill>
+                      <a:prstDash val="solid"/>
+                      <a:round/>
+                      <a:headEnd type="none" w="med" len="med"/>
+                      <a:tailEnd type="none" w="med" len="med"/>
+                    </a:lnB>
+                    <a:noFill/>
+                  </a:tcPr>
+                </a:tc>
+                <a:tc>
+                  <a:txBody>
+                    <a:bodyPr/>
+                    <a:lstStyle/>
+                    <a:p>
+                      <a:pPr algn="ctr" fontAlgn="ctr">
+                        <a:buNone/>
+                      </a:pPr>
+                      <a:r>
+                        <a:rPr lang="zh-CN" altLang="en-US" sz="900" b="1" i="0" u="none" strike="noStrike" dirty="0">
+                          <a:solidFill>
+                            <a:srgbClr val="000000"/>
+                          </a:solidFill>
+                          <a:effectLst/>
+                          <a:latin typeface="等线" panose="02010600030101010101" pitchFamily="2" charset="-122"/>
+                          <a:ea typeface="等线" panose="02010600030101010101" pitchFamily="2" charset="-122"/>
+                        </a:rPr>
+                        <a:t>第一阶段对文本和图像各自做掩码建模学习，第二阶段使用对比学习实现图像和文本对齐</a:t>
+                      </a:r>
+                    </a:p>
+                  </a:txBody>
+                  <a:tcPr marL="3097" marR="3097" marT="3097" marB="0" anchor="ctr">
+                    <a:lnL w="12700" cap="flat" cmpd="sng" algn="ctr">
+                      <a:solidFill>
+                        <a:schemeClr val="tx1"/>
+                      </a:solidFill>
+                      <a:prstDash val="solid"/>
+                      <a:round/>
+                      <a:headEnd type="none" w="med" len="med"/>
+                      <a:tailEnd type="none" w="med" len="med"/>
+                    </a:lnL>
+                    <a:lnR w="12700" cap="flat" cmpd="sng" algn="ctr">
+                      <a:solidFill>
+                        <a:schemeClr val="tx1"/>
+                      </a:solidFill>
+                      <a:prstDash val="solid"/>
+                      <a:round/>
+                      <a:headEnd type="none" w="med" len="med"/>
+                      <a:tailEnd type="none" w="med" len="med"/>
+                    </a:lnR>
+                    <a:lnT w="12700" cap="flat" cmpd="sng" algn="ctr">
+                      <a:solidFill>
+                        <a:schemeClr val="tx1"/>
+                      </a:solidFill>
+                      <a:prstDash val="solid"/>
+                      <a:round/>
+                      <a:headEnd type="none" w="med" len="med"/>
+                      <a:tailEnd type="none" w="med" len="med"/>
+                    </a:lnT>
+                    <a:lnB w="12700" cap="flat" cmpd="sng" algn="ctr">
+                      <a:solidFill>
+                        <a:schemeClr val="tx1"/>
+                      </a:solidFill>
+                      <a:prstDash val="solid"/>
+                      <a:round/>
+                      <a:headEnd type="none" w="med" len="med"/>
+                      <a:tailEnd type="none" w="med" len="med"/>
+                    </a:lnB>
+                    <a:noFill/>
+                  </a:tcPr>
+                </a:tc>
+                <a:extLst>
+                  <a:ext uri="{0D108BD9-81ED-4DB2-BD59-A6C34878D82A}">
+                    <a16:rowId xmlns:a16="http://schemas.microsoft.com/office/drawing/2014/main" val="4155436051"/>
+                  </a:ext>
+                </a:extLst>
+              </a:tr>
+            </a:tbl>
+          </a:graphicData>
+        </a:graphic>
+      </p:graphicFrame>
+    </p:spTree>
+    <p:extLst>
+      <p:ext uri="{BB962C8B-B14F-4D97-AF65-F5344CB8AC3E}">
+        <p14:creationId xmlns:p14="http://schemas.microsoft.com/office/powerpoint/2010/main" val="160020715"/>
+      </p:ext>
+    </p:extLst>
+  </p:cSld>
+  <p:clrMapOvr>
+    <a:masterClrMapping/>
+  </p:clrMapOvr>
+</p:sld>
+</file>
+
 <file path=ppt/theme/theme1.xml><?xml version="1.0" encoding="utf-8"?>
 <a:theme xmlns:a="http://schemas.openxmlformats.org/drawingml/2006/main" name="Office 主题​​">
   <a:themeElements>
